--- a/output/认知副驾项目汇报/认知副驾项目汇报.pptx
+++ b/output/认知副驾项目汇报/认知副驾项目汇报.pptx
@@ -1281,7 +1281,7 @@
   <p:cSld>
     <p:spTree>
       <p:nvGrpSpPr>
-        <p:cNvPr id="17" name="" descr="&lt;Slide style={{ width: 1280, height: 720, background: '#FFFFFF', flexDirection: 'column' }}&gt;&#10;    &lt;Box style={{ width: '100%', height: 8, background: '#1E4FA8' }} /&gt;&#10;    &lt;Box style={{ flex: 1, flexDirection: 'row', gap: 28, padding: '22px 40px 0 40px' }}&gt;&#10;        &lt;Box style={{ width: 330, height: 592, background: '#0E3F8C', borderRadius: 10, padding: '36px 30px', justifyContent: 'space-between' }}&gt;&#10;            &lt;Box&gt;&#10;                &lt;Text style={{ fontSize: 18, color: '#9FBCE8', letterSpacing: 3 }}&gt;维度三&lt;/Text&gt;&#10;                &lt;Text style={{ fontSize: 40, fontWeight: 'bold', color: '#FFFFFF', marginTop: 12 }}&gt;技术先进性&lt;/Text&gt;&#10;                &lt;Box style={{ flexDirection: 'row', alignItems: 'flex-end', gap: 8, marginTop: 18 }}&gt;&#10;                    &lt;Text style={{ fontSize: 64, fontWeight: 'bold', color: '#FFC107', lineHeight: 1 }}&gt;20&lt;/Text&gt;&#10;                    &lt;Text style={{ fontSize: 22, color: '#BBD0F0', paddingBottom: 6 }}&gt;分&lt;/Text&gt;&#10;                &lt;/Box&gt;&#10;            &lt;/Box&gt;&#10;            &lt;Box style={{ flexDirection: 'column', gap: 10 }}&gt;&#10;                &lt;Text style={{ fontSize: 19, color: '#E8EFF8', lineHeight: 1.6 }}&gt;对照评分细则三个子项：&lt;/Text&gt;&#10;                &lt;Text style={{ fontSize: 19, color: '#FFC107', lineHeight: 1.6 }}&gt;技术选型 · 6 分&lt;/Text&gt;&#10;                &lt;Text style={{ fontSize: 19, color: '#FFC107', lineHeight: 1.6 }}&gt;AI 应用深度 · 8 分&lt;/Text&gt;&#10;                &lt;Text style={{ fontSize: 19, color: '#FFC107', lineHeight: 1.6 }}&gt;技术难度 · 6 分&lt;/Text&gt;&#10;            &lt;/Box&gt;&#10;            &lt;Text style={{ fontSize: 18, color: '#BBD0F0', lineHeight: 1.6 }}&gt;每个名词都落到「我怎么做、为什么这样做」。&lt;/Text&gt;&#10;        &lt;/Box&gt;&#10;        &lt;Box style={{ flex: 1, flexDirection: 'column', justifyContent: 'space-between' }}&gt;&#10;            &lt;Box style={{ background: '#F7F9FC', borderRadius: 10, border: '1px solid #D6DCE5', padding: '16px 16px 8px 16px', alignItems: 'center' }}&gt;&#10;                &lt;Text style={{ fontSize: 20, fontWeight: 'bold', color: '#0E3F8C' }}&gt;RAG 与生成全链路（全部环节均已落地）&lt;/Text&gt;&#10;                &lt;svg width={812} height={148} viewBox='0 0 812 148'&gt;&#10;                    &lt;rect x='8' y='42' width='116' height='56' rx='8' fill='#E8EFF8' stroke='#3D7BD9' strokeWidth='1' /&gt;&#10;                    &lt;text x='66' y='66' fontSize='16' fill='#0E3F8C' textAnchor='middle' fontWeight='bold'&gt;知识录入&lt;/text&gt;&#10;                    &lt;text x='66' y='86' fontSize='13' fill='#4A5568' textAnchor='middle'&gt;条目即分块&lt;/text&gt;&#10;                    &lt;polygon points='128,64 142,70 128,76' fill='#3D7BD9' /&gt;&#10;                    &lt;rect x='146' y='42' width='116' height='56' rx='8' fill='#E8EFF8' stroke='#3D7BD9' strokeWidth='1' /&gt;&#10;                    &lt;text x='204' y='66' fontSize='16' fill='#0E3F8C' textAnchor='middle' fontWeight='bold'&gt;向量化&lt;/text&gt;&#10;                    &lt;text x='204' y='86' fontSize='13' fill='#4A5568' textAnchor='middle'&gt;BGE 本地离线&lt;/text&gt;&#10;                    &lt;polygon points='266,64 280,70 266,76' fill='#3D7BD9' /&gt;&#10;                    &lt;rect x='284' y='42' width='116' height='56' rx='8' fill='#E8EFF8' stroke='#3D7BD9' strokeWidth='1' /&gt;&#10;                    &lt;text x='342' y='66' fontSize='16' fill='#0E3F8C' textAnchor='middle' fontWeight='bold'&gt;混合召回&lt;/text&gt;&#10;                    &lt;text x='342' y='86' fontSize='13' fill='#4A5568' textAnchor='middle'&gt;向量＋关键词&lt;/text&gt;&#10;                    &lt;polygon points='404,64 418,70 404,76' fill='#3D7BD9' /&gt;&#10;                    &lt;rect x='422' y='42' width='116' height='56' rx='8' fill='#E8EFF8' stroke='#3D7BD9' strokeWidth='1' /&gt;&#10;                    &lt;text x='480' y='66' fontSize='16' fill='#0E3F8C' textAnchor='middle' fontWeight='bold'&gt;RRF 融合&lt;/text&gt;&#10;                    &lt;text x='480' y='86' fontSize='13' fill='#4A5568' textAnchor='middle'&gt;按排名免调参&lt;/text&gt;&#10;                    &lt;polygon points='542,64 556,70 542,76' fill='#3D7BD9' /&gt;&#10;                    &lt;rect x='560' y='42' width='116' height='56' rx='8' fill='#FFC107' opacity='0.9' /&gt;&#10;                    &lt;text x='618' y='66' fontSize='16' fill='#1A2230' textAnchor='middle' fontWeight='bold'&gt;评估护栏&lt;/text&gt;&#10;                    &lt;text x='618' y='86' fontSize='13' fill='#1A2230' textAnchor='middle'&gt;recall≥0.95&lt;/text&gt;&#10;                    &lt;polygon points='680,64 694,70 680,76' fill='#3D7BD9' /&gt;&#10;                    &lt;rect x='698' y='42' width='108' height='56' rx='8' fill='#0E3F8C' /&gt;&#10;                    &lt;text x='752' y='66' fontSize='16' fill='#FFFFFF' textAnchor='middle' fontWeight='bold'&gt;受约束生成&lt;/text&gt;&#10;                    &lt;text x='752' y='86' fontSize='13' fill='#BBD0F0' textAnchor='middle'&gt;Schema 6/6&lt;/text&gt;&#10;                    &lt;text x='8' y='128' fontSize='15' fill='#8B97A8'&gt;检索失败自动降级关键词通道，不丢条目、不阻断主链路；嵌入模型记录版本，可增量重建&lt;/text&gt;&#10;                &lt;/svg&gt;&#10;            &lt;/Box&gt;&#10;            &lt;Box style={{ flexDirection: 'row', alignItems: 'center', gap: 16, padding: '16px 22px', background: '#F7F9FC', borderRadius: 10, border: '1px solid #D6DCE5', borderLeft: '5px solid #1E4FA8' }}&gt;&#10;                &lt;FAIcon name='shield' style={{ fill: '#1E4FA8', width: 28, height: 28 }} /&gt;&#10;                &lt;Text style={{ flex: 1, fontSize: 19, color: '#1A2230', lineHeight: 1.55 }}&gt;&#10;                    &lt;span style={{ fontWeight: 'bold' }}&gt;双供应商链：&lt;/span&gt;DeepSeek ＋ MiMo 互为备份，失败重试满 3 次自动回退，切换时模型名、输出约束、计费单价全部重算——模型是插拔组件，不是系统地基&#10;                &lt;/Text&gt;&#10;            &lt;/Box&gt;&#10;            &lt;Box style={{ flexDirection: 'row', alignItems: 'center', gap: 16, padding: '16px 22px', background: '#F7F9FC', borderRadius: 10, border: '1px solid #D6DCE5', borderLeft: '5px solid #1E4FA8' }}&gt;&#10;                &lt;FAIcon name='cog' style={{ fill: '#1E4FA8', width: 28, height: 28 }} /&gt;&#10;                &lt;Text style={{ flex: 1, fontSize: 19, color: '#1A2230', lineHeight: 1.55 }}&gt;&#10;                    &lt;span style={{ fontWeight: 'bold' }}&gt;AI 应用深度：&lt;/span&gt;意图路由规则与模型分流；结构化输出交给服务端 Schema 约束（对比实验 6/6 全过，自由文本解析 3 次挂 1）；思考模式按任务开关控成本&#10;                &lt;/Text&gt;&#10;            &lt;/Box&gt;&#10;            &lt;Box style={{ flexDirection: 'row', alignItems: 'center', gap: 16, padding: '16px 22px', background: '#F7F9FC', borderRadius: 10, border: '1px solid #D6DCE5', borderLeft: '5px solid #1E4FA8' }}&gt;&#10;                &lt;FAIcon name='chart-line' style={{ fill: '#1E4FA8', width: 28, height: 28 }} /&gt;&#10;                &lt;Text style={{ flex: 1, fontSize: 19, color: '#1A2230', lineHeight: 1.55 }}&gt;&#10;                    &lt;span style={{ fontWeight: 'bold' }}&gt;技术难度：&lt;/span&gt;库内向量检索（pgvector 可选后端）＋ RRF 免调参融合；L2 判定真实评测 relation 准确率 &lt;span style={{ fontWeight: 'bold', color: '#0E3F8C' }}&gt;0.83&lt;/span&gt;、矛盾 P/R/F1 全 &lt;span style={{ fontWeight: 'bold', color: '#0E3F8C' }}&gt;1.0&lt;/span&gt;，并有回归承诺&#10;                &lt;/Text&gt;&#10;            &lt;/Box&gt;&#10;        &lt;/Box&gt;&#10;    &lt;/Box&gt;&#10;    &lt;Box style={{ flexDirection: 'row', justifyContent: 'space-between', alignItems: 'center', padding: '12px 40px 16px 40px' }}&gt;&#10;        &lt;Text style={{ fontSize: 14, color: '#8B97A8' }}&gt;认知副驾 · Cognitive Copilot&lt;/Text&gt;&#10;        &lt;Text style={{ fontSize: 14, color: '#1E4FA8' }}&gt;10 / 14&lt;/Text&gt;&#10;    &lt;/Box&gt;&#10;&lt;/Slide&gt;&#10;"/>
+        <p:cNvPr id="17" name="" descr="&lt;Slide style={{ width: 1280, height: 720, background: '#FFFFFF', flexDirection: 'column' }}&gt;&#10;    &lt;Box style={{ width: '100%', height: 8, background: '#1E4FA8' }} /&gt;&#10;    &lt;Box style={{ flex: 1, flexDirection: 'row', gap: 28, padding: '22px 40px 0 40px' }}&gt;&#10;        &lt;Box style={{ width: 330, height: 592, background: '#0E3F8C', borderRadius: 10, padding: '36px 30px', justifyContent: 'space-between' }}&gt;&#10;            &lt;Box&gt;&#10;                &lt;Text style={{ fontSize: 18, color: '#9FBCE8', letterSpacing: 3 }}&gt;维度三&lt;/Text&gt;&#10;                &lt;Text style={{ fontSize: 40, fontWeight: 'bold', color: '#FFFFFF', marginTop: 12 }}&gt;技术先进性&lt;/Text&gt;&#10;                &lt;Box style={{ flexDirection: 'row', alignItems: 'flex-end', gap: 8, marginTop: 18 }}&gt;&#10;                    &lt;Text style={{ fontSize: 64, fontWeight: 'bold', color: '#FFC107', lineHeight: 1 }}&gt;20&lt;/Text&gt;&#10;                    &lt;Text style={{ fontSize: 22, color: '#BBD0F0', paddingBottom: 6 }}&gt;分&lt;/Text&gt;&#10;                &lt;/Box&gt;&#10;            &lt;/Box&gt;&#10;            &lt;Box style={{ flexDirection: 'column', gap: 10 }}&gt;&#10;                &lt;Text style={{ fontSize: 19, color: '#E8EFF8', lineHeight: 1.6 }}&gt;对照评分细则三个子项：&lt;/Text&gt;&#10;                &lt;Text style={{ fontSize: 19, color: '#FFC107', lineHeight: 1.6 }}&gt;技术选型 · 6 分&lt;/Text&gt;&#10;                &lt;Text style={{ fontSize: 19, color: '#FFC107', lineHeight: 1.6 }}&gt;AI 应用深度 · 8 分&lt;/Text&gt;&#10;                &lt;Text style={{ fontSize: 19, color: '#FFC107', lineHeight: 1.6 }}&gt;技术难度 · 6 分&lt;/Text&gt;&#10;            &lt;/Box&gt;&#10;            &lt;Text style={{ fontSize: 18, color: '#BBD0F0', lineHeight: 1.6 }}&gt;每个名词都落到「我怎么做、为什么这样做」。&lt;/Text&gt;&#10;        &lt;/Box&gt;&#10;        &lt;Box style={{ flex: 1, flexDirection: 'column', justifyContent: 'space-between' }}&gt;&#10;            &lt;Box style={{ background: '#F7F9FC', borderRadius: 10, border: '1px solid #D6DCE5', padding: '16px 16px 8px 16px', alignItems: 'center' }}&gt;&#10;                &lt;Text style={{ fontSize: 20, fontWeight: 'bold', color: '#0E3F8C' }}&gt;RAG 与生成全链路（全部环节均已落地）&lt;/Text&gt;&#10;                &lt;svg width={812} height={148} viewBox='0 0 812 148'&gt;&#10;                    &lt;rect x='8' y='42' width='116' height='56' rx='8' fill='#E8EFF8' stroke='#3D7BD9' strokeWidth='1' /&gt;&#10;                    &lt;text x='66' y='66' fontSize='16' fill='#0E3F8C' textAnchor='middle' fontWeight='bold'&gt;知识录入&lt;/text&gt;&#10;                    &lt;text x='66' y='86' fontSize='13' fill='#4A5568' textAnchor='middle'&gt;条目即分块&lt;/text&gt;&#10;                    &lt;polygon points='128,64 142,70 128,76' fill='#3D7BD9' /&gt;&#10;                    &lt;rect x='146' y='42' width='116' height='56' rx='8' fill='#E8EFF8' stroke='#3D7BD9' strokeWidth='1' /&gt;&#10;                    &lt;text x='204' y='66' fontSize='16' fill='#0E3F8C' textAnchor='middle' fontWeight='bold'&gt;向量化&lt;/text&gt;&#10;                    &lt;text x='204' y='86' fontSize='13' fill='#4A5568' textAnchor='middle'&gt;BGE 本地离线&lt;/text&gt;&#10;                    &lt;polygon points='266,64 280,70 266,76' fill='#3D7BD9' /&gt;&#10;                    &lt;rect x='284' y='42' width='116' height='56' rx='8' fill='#E8EFF8' stroke='#3D7BD9' strokeWidth='1' /&gt;&#10;                    &lt;text x='342' y='66' fontSize='16' fill='#0E3F8C' textAnchor='middle' fontWeight='bold'&gt;混合召回&lt;/text&gt;&#10;                    &lt;text x='342' y='86' fontSize='13' fill='#4A5568' textAnchor='middle'&gt;向量＋关键词&lt;/text&gt;&#10;                    &lt;polygon points='404,64 418,70 404,76' fill='#3D7BD9' /&gt;&#10;                    &lt;rect x='422' y='42' width='116' height='56' rx='8' fill='#E8EFF8' stroke='#3D7BD9' strokeWidth='1' /&gt;&#10;                    &lt;text x='480' y='66' fontSize='16' fill='#0E3F8C' textAnchor='middle' fontWeight='bold'&gt;RRF 融合&lt;/text&gt;&#10;                    &lt;text x='480' y='86' fontSize='13' fill='#4A5568' textAnchor='middle'&gt;按排名免调参&lt;/text&gt;&#10;                    &lt;polygon points='542,64 556,70 542,76' fill='#3D7BD9' /&gt;&#10;                    &lt;rect x='560' y='42' width='116' height='56' rx='8' fill='#FFC107' opacity='0.9' /&gt;&#10;                    &lt;text x='618' y='66' fontSize='16' fill='#1A2230' textAnchor='middle' fontWeight='bold'&gt;评估护栏&lt;/text&gt;&#10;                    &lt;text x='618' y='86' fontSize='13' fill='#1A2230' textAnchor='middle'&gt;recall≥0.95&lt;/text&gt;&#10;                    &lt;polygon points='680,64 694,70 680,76' fill='#3D7BD9' /&gt;&#10;                    &lt;rect x='698' y='42' width='108' height='56' rx='8' fill='#0E3F8C' /&gt;&#10;                    &lt;text x='752' y='66' fontSize='16' fill='#FFFFFF' textAnchor='middle' fontWeight='bold'&gt;受约束生成&lt;/text&gt;&#10;                    &lt;text x='752' y='86' fontSize='13' fill='#BBD0F0' textAnchor='middle'&gt;Schema 6/6&lt;/text&gt;&#10;                    &lt;text x='8' y='128' fontSize='15' fill='#8B97A8'&gt;检索失败自动降级关键词通道，不丢条目、不阻断主链路；嵌入模型记录版本，可增量重建&lt;/text&gt;&#10;                &lt;/svg&gt;&#10;            &lt;/Box&gt;&#10;            &lt;Box style={{ flexDirection: 'row', alignItems: 'center', gap: 16, padding: '16px 22px', background: '#F7F9FC', borderRadius: 10, border: '1px solid #D6DCE5', borderLeft: '5px solid #1E4FA8' }}&gt;&#10;                &lt;FAIcon name='database' style={{ fill: '#1E4FA8', width: 28, height: 28 }} /&gt;&#10;                &lt;Text style={{ flex: 1, fontSize: 19, color: '#1A2230', lineHeight: 1.55 }}&gt;&#10;                    &lt;span style={{ fontWeight: 'bold' }}&gt;RAG 向量库：&lt;/span&gt;本地 BGE 中文向量模型（bge-small-zh-v1.5 · 512 维 · ONNX 离线部署）＋ PostgreSQL pgvector 库内余弦检索；向量＋关键词双通道召回、RRF 免调参融合，评估护栏 recall@5 ≥ 0.95&#10;                &lt;/Text&gt;&#10;            &lt;/Box&gt;&#10;            &lt;Box style={{ flexDirection: 'row', alignItems: 'center', gap: 16, padding: '16px 22px', background: '#F7F9FC', borderRadius: 10, border: '1px solid #D6DCE5', borderLeft: '5px solid #1E4FA8' }}&gt;&#10;                &lt;FAIcon name='cog' style={{ fill: '#1E4FA8', width: 28, height: 28 }} /&gt;&#10;                &lt;Text style={{ flex: 1, fontSize: 19, color: '#1A2230', lineHeight: 1.55 }}&gt;&#10;                    &lt;span style={{ fontWeight: 'bold' }}&gt;AI 应用深度：&lt;/span&gt;意图路由规则与模型分流；结构化输出交给服务端 Schema 约束（对比实验 6/6 全过，自由文本解析 3 次挂 1）；思考模式按任务开关控成本&#10;                &lt;/Text&gt;&#10;            &lt;/Box&gt;&#10;            &lt;Box style={{ flexDirection: 'row', alignItems: 'center', gap: 16, padding: '16px 22px', background: '#F7F9FC', borderRadius: 10, border: '1px solid #D6DCE5', borderLeft: '5px solid #1E4FA8' }}&gt;&#10;                &lt;FAIcon name='chart-line' style={{ fill: '#1E4FA8', width: 28, height: 28 }} /&gt;&#10;                &lt;Text style={{ flex: 1, fontSize: 19, color: '#1A2230', lineHeight: 1.55 }}&gt;&#10;                    &lt;span style={{ fontWeight: 'bold' }}&gt;技术难度：&lt;/span&gt;向量先筛把 L2 的 O(n²) 候选对压到 ≤20 对；L2 判定真实评测 relation 准确率 &lt;span style={{ fontWeight: 'bold', color: '#0E3F8C' }}&gt;0.83&lt;/span&gt;、矛盾 P/R/F1 全 &lt;span style={{ fontWeight: 'bold', color: '#0E3F8C' }}&gt;1.0&lt;/span&gt;，并有回归承诺&#10;                &lt;/Text&gt;&#10;            &lt;/Box&gt;&#10;        &lt;/Box&gt;&#10;    &lt;/Box&gt;&#10;    &lt;Box style={{ flexDirection: 'row', justifyContent: 'space-between', alignItems: 'center', padding: '12px 40px 16px 40px' }}&gt;&#10;        &lt;Text style={{ fontSize: 14, color: '#8B97A8' }}&gt;认知副驾 · Cognitive Copilot&lt;/Text&gt;&#10;        &lt;Text style={{ fontSize: 14, color: '#1E4FA8' }}&gt;10 / 14&lt;/Text&gt;&#10;    &lt;/Box&gt;&#10;&lt;/Slide&gt;&#10;"/>
         <p:cNvGrpSpPr/>
         <p:nvPr/>
       </p:nvGrpSpPr>
@@ -1869,7 +1869,288 @@
         </p:nvSpPr>
         <p:spPr>
           <a:xfrm rot="0" flipH="0" flipV="0">
-            <a:off x="3838575" y="2600325"/>
+            <a:off x="3838575" y="2486025"/>
+            <a:ext cx="8020050" cy="1323975"/>
+          </a:xfrm>
+          <a:prstGeom prst="roundRect">
+            <a:avLst>
+              <a:gd name="adj" fmla="val 7194"/>
+            </a:avLst>
+          </a:prstGeom>
+          <a:solidFill>
+            <a:srgbClr val="F7F9FC"/>
+          </a:solidFill>
+          <a:ln/>
+        </p:spPr>
+        <p:txBody>
+          <a:bodyPr/>
+          <a:p/>
+        </p:txBody>
+      </p:sp>
+      <p:sp>
+        <p:nvSpPr>
+          <p:cNvPr id="34" name=""/>
+          <p:cNvSpPr/>
+          <p:nvPr/>
+        </p:nvSpPr>
+        <p:spPr>
+          <a:xfrm rot="0" flipH="0" flipV="0">
+            <a:off x="3838575" y="2486025"/>
+            <a:ext cx="8020050" cy="1323975"/>
+          </a:xfrm>
+          <a:custGeom>
+            <a:pathLst>
+              <a:path w="842" h="139">
+                <a:moveTo>
+                  <a:pt x="10" y="0"/>
+                </a:moveTo>
+                <a:cubicBezTo>
+                  <a:pt x="7" y="0"/>
+                  <a:pt x="5" y="2"/>
+                  <a:pt x="5" y="5"/>
+                </a:cubicBezTo>
+                <a:lnTo>
+                  <a:pt x="5" y="134"/>
+                </a:lnTo>
+                <a:cubicBezTo>
+                  <a:pt x="5" y="136"/>
+                  <a:pt x="7" y="138"/>
+                  <a:pt x="9" y="139"/>
+                </a:cubicBezTo>
+                <a:cubicBezTo>
+                  <a:pt x="4" y="138"/>
+                  <a:pt x="0" y="134"/>
+                  <a:pt x="0" y="129"/>
+                </a:cubicBezTo>
+                <a:lnTo>
+                  <a:pt x="0" y="10"/>
+                </a:lnTo>
+                <a:cubicBezTo>
+                  <a:pt x="0" y="5"/>
+                  <a:pt x="4" y="0"/>
+                  <a:pt x="10" y="0"/>
+                </a:cubicBezTo>
+                <a:close/>
+              </a:path>
+            </a:pathLst>
+          </a:custGeom>
+          <a:solidFill>
+            <a:srgbClr val="1E4FA8"/>
+          </a:solidFill>
+          <a:ln/>
+        </p:spPr>
+        <p:txBody>
+          <a:bodyPr/>
+          <a:p/>
+        </p:txBody>
+      </p:sp>
+      <p:pic>
+        <p:nvPicPr>
+          <p:cNvPr id="35" name=""/>
+          <p:cNvPicPr>
+            <a:picLocks noChangeAspect="1"/>
+          </p:cNvPicPr>
+          <p:nvPr/>
+        </p:nvPicPr>
+        <p:blipFill>
+          <a:blip>
+            <a:extLst>
+              <a:ext uri="{96DAC541-7B7A-43D3-8B79-37D633B846F1}">
+                <asvg:svgBlip r:embed="rId2"/>
+              </a:ext>
+            </a:extLst>
+          </a:blip>
+          <a:stretch>
+            <a:fillRect/>
+          </a:stretch>
+        </p:blipFill>
+        <p:spPr>
+          <a:xfrm rot="0" flipH="0" flipV="0">
+            <a:off x="4048125" y="3019425"/>
+            <a:ext cx="266700" cy="266700"/>
+          </a:xfrm>
+          <a:prstGeom prst="rect">
+            <a:avLst/>
+          </a:prstGeom>
+          <a:ln/>
+        </p:spPr>
+      </p:pic>
+      <p:sp>
+        <p:nvSpPr>
+          <p:cNvPr id="36" name="" descr="{&quot;isTemplate&quot;:true,&quot;type&quot;:&quot;text&quot;}"/>
+          <p:cNvSpPr txBox="1"/>
+          <p:nvPr/>
+        </p:nvSpPr>
+        <p:spPr>
+          <a:xfrm rot="0" flipH="0" flipV="0">
+            <a:off x="4467225" y="2638425"/>
+            <a:ext cx="7134225" cy="1019175"/>
+          </a:xfrm>
+          <a:prstGeom prst="rect"/>
+        </p:spPr>
+        <p:txBody>
+          <a:bodyPr wrap="square" lIns="0" tIns="0" rIns="0" bIns="0">
+            <a:normAutofit/>
+          </a:bodyPr>
+          <a:p>
+            <a:pPr>
+              <a:lnSpc>
+                <a:spcPct val="155000"/>
+              </a:lnSpc>
+            </a:pPr>
+            <a:r>
+              <a:rPr lang="en-US" sz="1425" b="1">
+                <a:solidFill>
+                  <a:srgbClr val="1A2230"/>
+                </a:solidFill>
+                <a:latin typeface="Microsoft YaHei"/>
+                <a:ea typeface="Microsoft YaHei"/>
+              </a:rPr>
+              <a:t>RAG </a:t>
+            </a:r>
+            <a:r>
+              <a:rPr lang="zh-CN" sz="1425" b="1">
+                <a:solidFill>
+                  <a:srgbClr val="1A2230"/>
+                </a:solidFill>
+                <a:latin typeface="Microsoft YaHei"/>
+                <a:ea typeface="Microsoft YaHei"/>
+              </a:rPr>
+              <a:t>向量库：</a:t>
+            </a:r>
+            <a:r>
+              <a:rPr lang="zh-CN" sz="1425">
+                <a:solidFill>
+                  <a:srgbClr val="1A2230"/>
+                </a:solidFill>
+                <a:latin typeface="Microsoft YaHei"/>
+                <a:ea typeface="Microsoft YaHei"/>
+              </a:rPr>
+              <a:t>本地</a:t>
+            </a:r>
+            <a:r>
+              <a:rPr lang="en-US" sz="1425">
+                <a:solidFill>
+                  <a:srgbClr val="1A2230"/>
+                </a:solidFill>
+                <a:latin typeface="Microsoft YaHei"/>
+                <a:ea typeface="Microsoft YaHei"/>
+              </a:rPr>
+              <a:t> BGE </a:t>
+            </a:r>
+            <a:r>
+              <a:rPr lang="zh-CN" sz="1425">
+                <a:solidFill>
+                  <a:srgbClr val="1A2230"/>
+                </a:solidFill>
+                <a:latin typeface="Microsoft YaHei"/>
+                <a:ea typeface="Microsoft YaHei"/>
+              </a:rPr>
+              <a:t>中文向量模型（</a:t>
+            </a:r>
+            <a:r>
+              <a:rPr lang="en-US" sz="1425">
+                <a:solidFill>
+                  <a:srgbClr val="1A2230"/>
+                </a:solidFill>
+                <a:latin typeface="Microsoft YaHei"/>
+                <a:ea typeface="Microsoft YaHei"/>
+              </a:rPr>
+              <a:t>bge-small-zh-v1.5 · 512 </a:t>
+            </a:r>
+            <a:r>
+              <a:rPr lang="zh-CN" sz="1425">
+                <a:solidFill>
+                  <a:srgbClr val="1A2230"/>
+                </a:solidFill>
+                <a:latin typeface="Microsoft YaHei"/>
+                <a:ea typeface="Microsoft YaHei"/>
+              </a:rPr>
+              <a:t>维</a:t>
+            </a:r>
+            <a:r>
+              <a:rPr lang="en-US" sz="1425">
+                <a:solidFill>
+                  <a:srgbClr val="1A2230"/>
+                </a:solidFill>
+                <a:latin typeface="Microsoft YaHei"/>
+                <a:ea typeface="Microsoft YaHei"/>
+              </a:rPr>
+              <a:t> · ONNX </a:t>
+            </a:r>
+            <a:r>
+              <a:rPr lang="zh-CN" sz="1425">
+                <a:solidFill>
+                  <a:srgbClr val="1A2230"/>
+                </a:solidFill>
+                <a:latin typeface="Microsoft YaHei"/>
+                <a:ea typeface="Microsoft YaHei"/>
+              </a:rPr>
+              <a:t>离线部署）＋</a:t>
+            </a:r>
+            <a:r>
+              <a:rPr lang="en-US" sz="1425">
+                <a:solidFill>
+                  <a:srgbClr val="1A2230"/>
+                </a:solidFill>
+                <a:latin typeface="Microsoft YaHei"/>
+                <a:ea typeface="Microsoft YaHei"/>
+              </a:rPr>
+              <a:t> PostgreSQL pgvector </a:t>
+            </a:r>
+            <a:r>
+              <a:rPr lang="zh-CN" sz="1425">
+                <a:solidFill>
+                  <a:srgbClr val="1A2230"/>
+                </a:solidFill>
+                <a:latin typeface="Microsoft YaHei"/>
+                <a:ea typeface="Microsoft YaHei"/>
+              </a:rPr>
+              <a:t>库内余弦检索；向量＋关键词双通道召回、</a:t>
+            </a:r>
+            <a:r>
+              <a:rPr lang="en-US" sz="1425">
+                <a:solidFill>
+                  <a:srgbClr val="1A2230"/>
+                </a:solidFill>
+                <a:latin typeface="Microsoft YaHei"/>
+                <a:ea typeface="Microsoft YaHei"/>
+              </a:rPr>
+              <a:t>RRF </a:t>
+            </a:r>
+            <a:r>
+              <a:rPr lang="zh-CN" sz="1425">
+                <a:solidFill>
+                  <a:srgbClr val="1A2230"/>
+                </a:solidFill>
+                <a:latin typeface="Microsoft YaHei"/>
+                <a:ea typeface="Microsoft YaHei"/>
+              </a:rPr>
+              <a:t>免调参融合，评估护栏</a:t>
+            </a:r>
+            <a:r>
+              <a:rPr lang="en-US" sz="1425">
+                <a:solidFill>
+                  <a:srgbClr val="1A2230"/>
+                </a:solidFill>
+                <a:latin typeface="Microsoft YaHei"/>
+                <a:ea typeface="Microsoft YaHei"/>
+              </a:rPr>
+              <a:t> recall@5 ≥ 0.95</a:t>
+            </a:r>
+            <a:endParaRPr/>
+          </a:p>
+        </p:txBody>
+      </p:sp>
+      <p:sp>
+        <p:nvSpPr>
+          <p:cNvPr id="37" name=""/>
+          <p:cNvSpPr/>
+          <p:nvPr/>
+        </p:nvSpPr>
+        <p:spPr>
+          <a:xfrm rot="0" flipH="0" flipV="0">
+            <a:off x="3838575" y="4133850"/>
             <a:ext cx="8020050" cy="981075"/>
           </a:xfrm>
           <a:prstGeom prst="roundRect">
@@ -1889,13 +2170,13 @@
       </p:sp>
       <p:sp>
         <p:nvSpPr>
-          <p:cNvPr id="34" name=""/>
+          <p:cNvPr id="38" name=""/>
           <p:cNvSpPr/>
           <p:nvPr/>
         </p:nvSpPr>
         <p:spPr>
           <a:xfrm rot="0" flipH="0" flipV="0">
-            <a:off x="3838575" y="2600325"/>
+            <a:off x="3838575" y="4133850"/>
             <a:ext cx="8020050" cy="981075"/>
           </a:xfrm>
           <a:custGeom>
@@ -1946,7 +2227,7 @@
       </p:sp>
       <p:pic>
         <p:nvPicPr>
-          <p:cNvPr id="35" name=""/>
+          <p:cNvPr id="39" name=""/>
           <p:cNvPicPr>
             <a:picLocks noChangeAspect="1"/>
           </p:cNvPicPr>
@@ -1956,7 +2237,7 @@
           <a:blip>
             <a:extLst>
               <a:ext uri="{96DAC541-7B7A-43D3-8B79-37D633B846F1}">
-                <asvg:svgBlip r:embed="rId2"/>
+                <asvg:svgBlip r:embed="rId3"/>
               </a:ext>
             </a:extLst>
           </a:blip>
@@ -1966,7 +2247,7 @@
         </p:blipFill>
         <p:spPr>
           <a:xfrm rot="0" flipH="0" flipV="0">
-            <a:off x="4048125" y="2962275"/>
+            <a:off x="4048125" y="4495800"/>
             <a:ext cx="266700" cy="266700"/>
           </a:xfrm>
           <a:prstGeom prst="rect">
@@ -1977,13 +2258,13 @@
       </p:pic>
       <p:sp>
         <p:nvSpPr>
-          <p:cNvPr id="36" name="" descr="{&quot;isTemplate&quot;:true,&quot;type&quot;:&quot;text&quot;}"/>
-          <p:cNvSpPr txBox="1"/>
-          <p:nvPr/>
-        </p:nvSpPr>
-        <p:spPr>
-          <a:xfrm rot="0" flipH="0" flipV="0">
-            <a:off x="4467225" y="2752725"/>
+          <p:cNvPr id="40" name="" descr="{&quot;isTemplate&quot;:true,&quot;type&quot;:&quot;text&quot;}"/>
+          <p:cNvSpPr txBox="1"/>
+          <p:nvPr/>
+        </p:nvSpPr>
+        <p:spPr>
+          <a:xfrm rot="0" flipH="0" flipV="0">
+            <a:off x="4467225" y="4286250"/>
             <a:ext cx="7134225" cy="676275"/>
           </a:xfrm>
           <a:prstGeom prst="rect"/>
@@ -1999,6 +2280,16 @@
               </a:lnSpc>
             </a:pPr>
             <a:r>
+              <a:rPr lang="en-US" sz="1425" b="1">
+                <a:solidFill>
+                  <a:srgbClr val="1A2230"/>
+                </a:solidFill>
+                <a:latin typeface="Microsoft YaHei"/>
+                <a:ea typeface="Microsoft YaHei"/>
+              </a:rPr>
+              <a:t>AI </a:t>
+            </a:r>
+            <a:r>
               <a:rPr lang="zh-CN" sz="1425" b="1">
                 <a:solidFill>
                   <a:srgbClr val="1A2230"/>
@@ -2006,7 +2297,17 @@
                 <a:latin typeface="Microsoft YaHei"/>
                 <a:ea typeface="Microsoft YaHei"/>
               </a:rPr>
-              <a:t>双供应商链：</a:t>
+              <a:t>应用深度：</a:t>
+            </a:r>
+            <a:r>
+              <a:rPr lang="zh-CN" sz="1425">
+                <a:solidFill>
+                  <a:srgbClr val="1A2230"/>
+                </a:solidFill>
+                <a:latin typeface="Microsoft YaHei"/>
+                <a:ea typeface="Microsoft YaHei"/>
+              </a:rPr>
+              <a:t>意图路由规则与模型分流；结构化输出交给服务端</a:t>
             </a:r>
             <a:r>
               <a:rPr lang="en-US" sz="1425">
@@ -2016,7 +2317,7 @@
                 <a:latin typeface="Microsoft YaHei"/>
                 <a:ea typeface="Microsoft YaHei"/>
               </a:rPr>
-              <a:t>DeepSeek </a:t>
+              <a:t> Schema </a:t>
             </a:r>
             <a:r>
               <a:rPr lang="zh-CN" sz="1425">
@@ -2026,7 +2327,7 @@
                 <a:latin typeface="Microsoft YaHei"/>
                 <a:ea typeface="Microsoft YaHei"/>
               </a:rPr>
-              <a:t>＋</a:t>
+              <a:t>约束（对比实验</a:t>
             </a:r>
             <a:r>
               <a:rPr lang="en-US" sz="1425">
@@ -2036,7 +2337,7 @@
                 <a:latin typeface="Microsoft YaHei"/>
                 <a:ea typeface="Microsoft YaHei"/>
               </a:rPr>
-              <a:t> MiMo </a:t>
+              <a:t> 6/6 </a:t>
             </a:r>
             <a:r>
               <a:rPr lang="zh-CN" sz="1425">
@@ -2046,7 +2347,7 @@
                 <a:latin typeface="Microsoft YaHei"/>
                 <a:ea typeface="Microsoft YaHei"/>
               </a:rPr>
-              <a:t>互为备份，失败重试满</a:t>
+              <a:t>全过，自由文本解析</a:t>
             </a:r>
             <a:r>
               <a:rPr lang="en-US" sz="1425">
@@ -2066,21 +2367,41 @@
                 <a:latin typeface="Microsoft YaHei"/>
                 <a:ea typeface="Microsoft YaHei"/>
               </a:rPr>
-              <a:t>次自动回退，切换时模型名、输出约束、计费单价全部重算——模型是插拔组件，不是系统地基</a:t>
-            </a:r>
-            <a:endParaRPr/>
-          </a:p>
-        </p:txBody>
-      </p:sp>
-      <p:sp>
-        <p:nvSpPr>
-          <p:cNvPr id="37" name=""/>
+              <a:t>次挂</a:t>
+            </a:r>
+            <a:r>
+              <a:rPr lang="en-US" sz="1425">
+                <a:solidFill>
+                  <a:srgbClr val="1A2230"/>
+                </a:solidFill>
+                <a:latin typeface="Microsoft YaHei"/>
+                <a:ea typeface="Microsoft YaHei"/>
+              </a:rPr>
+              <a:t> 1</a:t>
+            </a:r>
+            <a:r>
+              <a:rPr lang="zh-CN" sz="1425">
+                <a:solidFill>
+                  <a:srgbClr val="1A2230"/>
+                </a:solidFill>
+                <a:latin typeface="Microsoft YaHei"/>
+                <a:ea typeface="Microsoft YaHei"/>
+              </a:rPr>
+              <a:t>）；思考模式按任务开关控成本</a:t>
+            </a:r>
+            <a:endParaRPr/>
+          </a:p>
+        </p:txBody>
+      </p:sp>
+      <p:sp>
+        <p:nvSpPr>
+          <p:cNvPr id="41" name=""/>
           <p:cNvSpPr/>
           <p:nvPr/>
         </p:nvSpPr>
         <p:spPr>
           <a:xfrm rot="0" flipH="0" flipV="0">
-            <a:off x="3838575" y="4019550"/>
+            <a:off x="3838575" y="5448300"/>
             <a:ext cx="8020050" cy="981075"/>
           </a:xfrm>
           <a:prstGeom prst="roundRect">
@@ -2100,13 +2421,13 @@
       </p:sp>
       <p:sp>
         <p:nvSpPr>
-          <p:cNvPr id="38" name=""/>
+          <p:cNvPr id="42" name=""/>
           <p:cNvSpPr/>
           <p:nvPr/>
         </p:nvSpPr>
         <p:spPr>
           <a:xfrm rot="0" flipH="0" flipV="0">
-            <a:off x="3838575" y="4019550"/>
+            <a:off x="3838575" y="5448300"/>
             <a:ext cx="8020050" cy="981075"/>
           </a:xfrm>
           <a:custGeom>
@@ -2157,257 +2478,6 @@
       </p:sp>
       <p:pic>
         <p:nvPicPr>
-          <p:cNvPr id="39" name=""/>
-          <p:cNvPicPr>
-            <a:picLocks noChangeAspect="1"/>
-          </p:cNvPicPr>
-          <p:nvPr/>
-        </p:nvPicPr>
-        <p:blipFill>
-          <a:blip>
-            <a:extLst>
-              <a:ext uri="{96DAC541-7B7A-43D3-8B79-37D633B846F1}">
-                <asvg:svgBlip r:embed="rId3"/>
-              </a:ext>
-            </a:extLst>
-          </a:blip>
-          <a:stretch>
-            <a:fillRect/>
-          </a:stretch>
-        </p:blipFill>
-        <p:spPr>
-          <a:xfrm rot="0" flipH="0" flipV="0">
-            <a:off x="4048125" y="4381500"/>
-            <a:ext cx="266700" cy="266700"/>
-          </a:xfrm>
-          <a:prstGeom prst="rect">
-            <a:avLst/>
-          </a:prstGeom>
-          <a:ln/>
-        </p:spPr>
-      </p:pic>
-      <p:sp>
-        <p:nvSpPr>
-          <p:cNvPr id="40" name="" descr="{&quot;isTemplate&quot;:true,&quot;type&quot;:&quot;text&quot;}"/>
-          <p:cNvSpPr txBox="1"/>
-          <p:nvPr/>
-        </p:nvSpPr>
-        <p:spPr>
-          <a:xfrm rot="0" flipH="0" flipV="0">
-            <a:off x="4467225" y="4171950"/>
-            <a:ext cx="7134225" cy="676275"/>
-          </a:xfrm>
-          <a:prstGeom prst="rect"/>
-        </p:spPr>
-        <p:txBody>
-          <a:bodyPr wrap="square" lIns="0" tIns="0" rIns="0" bIns="0">
-            <a:normAutofit/>
-          </a:bodyPr>
-          <a:p>
-            <a:pPr>
-              <a:lnSpc>
-                <a:spcPct val="155000"/>
-              </a:lnSpc>
-            </a:pPr>
-            <a:r>
-              <a:rPr lang="en-US" sz="1425" b="1">
-                <a:solidFill>
-                  <a:srgbClr val="1A2230"/>
-                </a:solidFill>
-                <a:latin typeface="Microsoft YaHei"/>
-                <a:ea typeface="Microsoft YaHei"/>
-              </a:rPr>
-              <a:t>AI </a:t>
-            </a:r>
-            <a:r>
-              <a:rPr lang="zh-CN" sz="1425" b="1">
-                <a:solidFill>
-                  <a:srgbClr val="1A2230"/>
-                </a:solidFill>
-                <a:latin typeface="Microsoft YaHei"/>
-                <a:ea typeface="Microsoft YaHei"/>
-              </a:rPr>
-              <a:t>应用深度：</a:t>
-            </a:r>
-            <a:r>
-              <a:rPr lang="zh-CN" sz="1425">
-                <a:solidFill>
-                  <a:srgbClr val="1A2230"/>
-                </a:solidFill>
-                <a:latin typeface="Microsoft YaHei"/>
-                <a:ea typeface="Microsoft YaHei"/>
-              </a:rPr>
-              <a:t>意图路由规则与模型分流；结构化输出交给服务端</a:t>
-            </a:r>
-            <a:r>
-              <a:rPr lang="en-US" sz="1425">
-                <a:solidFill>
-                  <a:srgbClr val="1A2230"/>
-                </a:solidFill>
-                <a:latin typeface="Microsoft YaHei"/>
-                <a:ea typeface="Microsoft YaHei"/>
-              </a:rPr>
-              <a:t> Schema </a:t>
-            </a:r>
-            <a:r>
-              <a:rPr lang="zh-CN" sz="1425">
-                <a:solidFill>
-                  <a:srgbClr val="1A2230"/>
-                </a:solidFill>
-                <a:latin typeface="Microsoft YaHei"/>
-                <a:ea typeface="Microsoft YaHei"/>
-              </a:rPr>
-              <a:t>约束（对比实验</a:t>
-            </a:r>
-            <a:r>
-              <a:rPr lang="en-US" sz="1425">
-                <a:solidFill>
-                  <a:srgbClr val="1A2230"/>
-                </a:solidFill>
-                <a:latin typeface="Microsoft YaHei"/>
-                <a:ea typeface="Microsoft YaHei"/>
-              </a:rPr>
-              <a:t> 6/6 </a:t>
-            </a:r>
-            <a:r>
-              <a:rPr lang="zh-CN" sz="1425">
-                <a:solidFill>
-                  <a:srgbClr val="1A2230"/>
-                </a:solidFill>
-                <a:latin typeface="Microsoft YaHei"/>
-                <a:ea typeface="Microsoft YaHei"/>
-              </a:rPr>
-              <a:t>全过，自由文本解析</a:t>
-            </a:r>
-            <a:r>
-              <a:rPr lang="en-US" sz="1425">
-                <a:solidFill>
-                  <a:srgbClr val="1A2230"/>
-                </a:solidFill>
-                <a:latin typeface="Microsoft YaHei"/>
-                <a:ea typeface="Microsoft YaHei"/>
-              </a:rPr>
-              <a:t> 3 </a:t>
-            </a:r>
-            <a:r>
-              <a:rPr lang="zh-CN" sz="1425">
-                <a:solidFill>
-                  <a:srgbClr val="1A2230"/>
-                </a:solidFill>
-                <a:latin typeface="Microsoft YaHei"/>
-                <a:ea typeface="Microsoft YaHei"/>
-              </a:rPr>
-              <a:t>次挂</a:t>
-            </a:r>
-            <a:r>
-              <a:rPr lang="en-US" sz="1425">
-                <a:solidFill>
-                  <a:srgbClr val="1A2230"/>
-                </a:solidFill>
-                <a:latin typeface="Microsoft YaHei"/>
-                <a:ea typeface="Microsoft YaHei"/>
-              </a:rPr>
-              <a:t> 1</a:t>
-            </a:r>
-            <a:r>
-              <a:rPr lang="zh-CN" sz="1425">
-                <a:solidFill>
-                  <a:srgbClr val="1A2230"/>
-                </a:solidFill>
-                <a:latin typeface="Microsoft YaHei"/>
-                <a:ea typeface="Microsoft YaHei"/>
-              </a:rPr>
-              <a:t>）；思考模式按任务开关控成本</a:t>
-            </a:r>
-            <a:endParaRPr/>
-          </a:p>
-        </p:txBody>
-      </p:sp>
-      <p:sp>
-        <p:nvSpPr>
-          <p:cNvPr id="41" name=""/>
-          <p:cNvSpPr/>
-          <p:nvPr/>
-        </p:nvSpPr>
-        <p:spPr>
-          <a:xfrm rot="0" flipH="0" flipV="0">
-            <a:off x="3838575" y="5448300"/>
-            <a:ext cx="8020050" cy="981075"/>
-          </a:xfrm>
-          <a:prstGeom prst="roundRect">
-            <a:avLst>
-              <a:gd name="adj" fmla="val 9709"/>
-            </a:avLst>
-          </a:prstGeom>
-          <a:solidFill>
-            <a:srgbClr val="F7F9FC"/>
-          </a:solidFill>
-          <a:ln/>
-        </p:spPr>
-        <p:txBody>
-          <a:bodyPr/>
-          <a:p/>
-        </p:txBody>
-      </p:sp>
-      <p:sp>
-        <p:nvSpPr>
-          <p:cNvPr id="42" name=""/>
-          <p:cNvSpPr/>
-          <p:nvPr/>
-        </p:nvSpPr>
-        <p:spPr>
-          <a:xfrm rot="0" flipH="0" flipV="0">
-            <a:off x="3838575" y="5448300"/>
-            <a:ext cx="8020050" cy="981075"/>
-          </a:xfrm>
-          <a:custGeom>
-            <a:pathLst>
-              <a:path w="842" h="103">
-                <a:moveTo>
-                  <a:pt x="10" y="0"/>
-                </a:moveTo>
-                <a:cubicBezTo>
-                  <a:pt x="7" y="0"/>
-                  <a:pt x="5" y="2"/>
-                  <a:pt x="5" y="5"/>
-                </a:cubicBezTo>
-                <a:lnTo>
-                  <a:pt x="5" y="98"/>
-                </a:lnTo>
-                <a:cubicBezTo>
-                  <a:pt x="5" y="100"/>
-                  <a:pt x="7" y="102"/>
-                  <a:pt x="9" y="103"/>
-                </a:cubicBezTo>
-                <a:cubicBezTo>
-                  <a:pt x="4" y="102"/>
-                  <a:pt x="0" y="98"/>
-                  <a:pt x="0" y="93"/>
-                </a:cubicBezTo>
-                <a:lnTo>
-                  <a:pt x="0" y="10"/>
-                </a:lnTo>
-                <a:cubicBezTo>
-                  <a:pt x="0" y="5"/>
-                  <a:pt x="4" y="0"/>
-                  <a:pt x="10" y="0"/>
-                </a:cubicBezTo>
-                <a:close/>
-              </a:path>
-            </a:pathLst>
-          </a:custGeom>
-          <a:solidFill>
-            <a:srgbClr val="1E4FA8"/>
-          </a:solidFill>
-          <a:ln/>
-        </p:spPr>
-        <p:txBody>
-          <a:bodyPr/>
-          <a:p/>
-        </p:txBody>
-      </p:sp>
-      <p:pic>
-        <p:nvPicPr>
           <p:cNvPr id="43" name=""/>
           <p:cNvPicPr>
             <a:picLocks noChangeAspect="1"/>
@@ -2478,7 +2548,7 @@
                 <a:latin typeface="Microsoft YaHei"/>
                 <a:ea typeface="Microsoft YaHei"/>
               </a:rPr>
-              <a:t>库内向量检索（</a:t>
+              <a:t>向量先筛把</a:t>
             </a:r>
             <a:r>
               <a:rPr lang="en-US" sz="1425">
@@ -2488,7 +2558,7 @@
                 <a:latin typeface="Microsoft YaHei"/>
                 <a:ea typeface="Microsoft YaHei"/>
               </a:rPr>
-              <a:t>pgvector </a:t>
+              <a:t> L2 </a:t>
             </a:r>
             <a:r>
               <a:rPr lang="zh-CN" sz="1425">
@@ -2498,7 +2568,7 @@
                 <a:latin typeface="Microsoft YaHei"/>
                 <a:ea typeface="Microsoft YaHei"/>
               </a:rPr>
-              <a:t>可选后端）＋</a:t>
+              <a:t>的</a:t>
             </a:r>
             <a:r>
               <a:rPr lang="en-US" sz="1425">
@@ -2508,7 +2578,7 @@
                 <a:latin typeface="Microsoft YaHei"/>
                 <a:ea typeface="Microsoft YaHei"/>
               </a:rPr>
-              <a:t> RRF </a:t>
+              <a:t> O(n²) </a:t>
             </a:r>
             <a:r>
               <a:rPr lang="zh-CN" sz="1425">
@@ -2518,7 +2588,27 @@
                 <a:latin typeface="Microsoft YaHei"/>
                 <a:ea typeface="Microsoft YaHei"/>
               </a:rPr>
-              <a:t>免调参融合；</a:t>
+              <a:t>候选对压到</a:t>
+            </a:r>
+            <a:r>
+              <a:rPr lang="en-US" sz="1425">
+                <a:solidFill>
+                  <a:srgbClr val="1A2230"/>
+                </a:solidFill>
+                <a:latin typeface="Microsoft YaHei"/>
+                <a:ea typeface="Microsoft YaHei"/>
+              </a:rPr>
+              <a:t> ≤20 </a:t>
+            </a:r>
+            <a:r>
+              <a:rPr lang="zh-CN" sz="1425">
+                <a:solidFill>
+                  <a:srgbClr val="1A2230"/>
+                </a:solidFill>
+                <a:latin typeface="Microsoft YaHei"/>
+                <a:ea typeface="Microsoft YaHei"/>
+              </a:rPr>
+              <a:t>对；</a:t>
             </a:r>
             <a:r>
               <a:rPr lang="en-US" sz="1425">
@@ -2734,7 +2824,7 @@
   <p:cSld>
     <p:spTree>
       <p:nvGrpSpPr>
-        <p:cNvPr id="47" name="" descr="&lt;Slide style={{ width: 1280, height: 720, background: '#FFFFFF', flexDirection: 'column' }}&gt;&#10;    &lt;Box style={{ width: '100%', height: 8, background: '#1E4FA8' }} /&gt;&#10;    &lt;Box style={{ flexDirection: 'row', justifyContent: 'space-between', alignItems: 'flex-end', padding: '20px 40px 12px 40px' }}&gt;&#10;        &lt;Text style={{ fontSize: 34, fontWeight: 'bold', color: '#0E3F8C' }}&gt;维度四 · 功能完善性（20 分）&lt;/Text&gt;&#10;        &lt;Text style={{ fontSize: 17, color: '#8B97A8' }}&gt;按评分细则四个子项逐一对齐&lt;/Text&gt;&#10;    &lt;/Box&gt;&#10;    &lt;Box style={{ flex: 1, flexDirection: 'row', gap: 20, padding: '6px 40px 0 40px' }}&gt;&#10;        &lt;Box style={{ flex: 1, background: '#F7F9FC', borderRadius: 10, border: '1px solid #D6DCE5', borderTop: '5px solid #1E4FA8', padding: '22px 22px', justifyContent: 'space-between' }}&gt;&#10;            &lt;Box&gt;&#10;                &lt;Box style={{ flexDirection: 'row', justifyContent: 'space-between', alignItems: 'center' }}&gt;&#10;                    &lt;Text style={{ fontSize: 24, fontWeight: 'bold', color: '#1A2230' }}&gt;功能完成度&lt;/Text&gt;&#10;                    &lt;Box style={{ padding: '4px 12px', background: '#E8EFF8', borderRadius: 14 }}&gt;&#10;                        &lt;Text style={{ fontSize: 16, fontWeight: 'bold', color: '#0E3F8C' }}&gt;8 分&lt;/Text&gt;&#10;                    &lt;/Box&gt;&#10;                &lt;/Box&gt;&#10;                &lt;Text style={{ fontSize: 18, color: '#4A5568', marginTop: 14, lineHeight: 1.6 }}&gt;&#10;                    策划承诺的核心功能全部实现、可现场演示。&lt;span style={{ fontWeight: 'bold', color: '#0E3F8C' }}&gt;10 项能力全部接入对话入口&lt;/span&gt;，一句话即可调用。&#10;                &lt;/Text&gt;&#10;            &lt;/Box&gt;&#10;            &lt;Text style={{ fontSize: 15, color: '#8B97A8', lineHeight: 1.5 }}&gt;挖掘 / 冲突 / 简报 / 计划 / 诊断 / 录入 / 同步 / 书架&lt;/Text&gt;&#10;        &lt;/Box&gt;&#10;        &lt;Box style={{ flex: 1, background: '#F7F9FC', borderRadius: 10, border: '1px solid #D6DCE5', borderTop: '5px solid #1E4FA8', padding: '22px 22px', justifyContent: 'space-between' }}&gt;&#10;            &lt;Box&gt;&#10;                &lt;Box style={{ flexDirection: 'row', justifyContent: 'space-between', alignItems: 'center' }}&gt;&#10;                    &lt;Text style={{ fontSize: 24, fontWeight: 'bold', color: '#1A2230' }}&gt;稳定与容错&lt;/Text&gt;&#10;                    &lt;Box style={{ padding: '4px 12px', background: '#E8EFF8', borderRadius: 14 }}&gt;&#10;                        &lt;Text style={{ fontSize: 16, fontWeight: 'bold', color: '#0E3F8C' }}&gt;5 分&lt;/Text&gt;&#10;                    &lt;/Box&gt;&#10;                &lt;/Box&gt;&#10;                &lt;Text style={{ fontSize: 18, color: '#4A5568', marginTop: 14, lineHeight: 1.6 }}&gt;&#10;                    模型故障自动切备用供应商；检索失败降级关键词通道；会话过期&lt;span style={{ fontWeight: 'bold', color: '#0E3F8C' }}&gt;静默续期&lt;/span&gt;；异常输入有兜底提示，不裸抛错误。&#10;                &lt;/Text&gt;&#10;            &lt;/Box&gt;&#10;            &lt;Text style={{ fontSize: 15, color: '#8B97A8', lineHeight: 1.5 }}&gt;降级有边界：模拟结果绝不冒充真实结果&lt;/Text&gt;&#10;        &lt;/Box&gt;&#10;        &lt;Box style={{ flex: 1, background: '#F7F9FC', borderRadius: 10, border: '1px solid #D6DCE5', borderTop: '5px solid #1E4FA8', padding: '22px 22px', justifyContent: 'space-between' }}&gt;&#10;            &lt;Box&gt;&#10;                &lt;Box style={{ flexDirection: 'row', justifyContent: 'space-between', alignItems: 'center' }}&gt;&#10;                    &lt;Text style={{ fontSize: 24, fontWeight: 'bold', color: '#1A2230' }}&gt;界面体验&lt;/Text&gt;&#10;                    &lt;Box style={{ padding: '4px 12px', background: '#E8EFF8', borderRadius: 14 }}&gt;&#10;                        &lt;Text style={{ fontSize: 16, fontWeight: 'bold', color: '#0E3F8C' }}&gt;4 分&lt;/Text&gt;&#10;                    &lt;/Box&gt;&#10;                &lt;/Box&gt;&#10;                &lt;Text style={{ fontSize: 18, color: '#4A5568', marginTop: 14, lineHeight: 1.6 }}&gt;&#10;                    登录即落地&lt;span style={{ fontWeight: 'bold', color: '#0E3F8C' }}&gt;对话工作台&lt;/span&gt;，耗时能力先回「进行中」卡、完成后就地改写；9 个功能页全保留，信息直给、无冗余装饰。&#10;                &lt;/Text&gt;&#10;            &lt;/Box&gt;&#10;            &lt;Text style={{ fontSize: 15, color: '#8B97A8', lineHeight: 1.5 }}&gt;结果以卡片回写会话，打开即见最终状态&lt;/Text&gt;&#10;        &lt;/Box&gt;&#10;        &lt;Box style={{ flex: 1, background: '#F7F9FC', borderRadius: 10, border: '1px solid #D6DCE5', borderTop: '5px solid #1E4FA8', padding: '22px 22px', justifyContent: 'space-between' }}&gt;&#10;            &lt;Box&gt;&#10;                &lt;Box style={{ flexDirection: 'row', justifyContent: 'space-between', alignItems: 'center' }}&gt;&#10;                    &lt;Text style={{ fontSize: 24, fontWeight: 'bold', color: '#1A2230' }}&gt;代码质量&lt;/Text&gt;&#10;                    &lt;Box style={{ padding: '4px 12px', background: '#E8EFF8', borderRadius: 14 }}&gt;&#10;                        &lt;Text style={{ fontSize: 16, fontWeight: 'bold', color: '#0E3F8C' }}&gt;3 分&lt;/Text&gt;&#10;                    &lt;/Box&gt;&#10;                &lt;/Box&gt;&#10;                &lt;Text style={{ fontSize: 18, color: '#4A5568', marginTop: 14, lineHeight: 1.6 }}&gt;&#10;                    分层清晰（网关 / 领域 / 能力 / 前端），仓储层结构性强制账号隔离；&lt;span style={{ fontWeight: 'bold', color: '#0E3F8C' }}&gt;647 项测试全绿&lt;/span&gt;、提交粒度真实、20 条复盘沉淀。&#10;                &lt;/Text&gt;&#10;            &lt;/Box&gt;&#10;            &lt;Text style={{ fontSize: 15, color: '#8B97A8', lineHeight: 1.5 }}&gt;测试全程模拟调用，不联网、秒级可回归&lt;/Text&gt;&#10;        &lt;/Box&gt;&#10;    &lt;/Box&gt;&#10;    &lt;Box style={{ margin: '16px 40px 0 40px', padding: '14px 24px', background: '#0E3F8C', borderRadius: 8 }}&gt;&#10;        &lt;Text style={{ fontSize: 20, color: '#FFFFFF', textAlign: 'center' }}&gt;&#10;            稳定性的底气来自工程习惯：每一次降级都设计过边界，每一个静默失败都被写进复盘并加了测试断言&#10;        &lt;/Text&gt;&#10;    &lt;/Box&gt;&#10;    &lt;Box style={{ flexDirection: 'row', justifyContent: 'space-between', alignItems: 'center', padding: '10px 40px 14px 40px' }}&gt;&#10;        &lt;Text style={{ fontSize: 14, color: '#8B97A8' }}&gt;认知副驾 · Cognitive Copilot&lt;/Text&gt;&#10;        &lt;Text style={{ fontSize: 14, color: '#1E4FA8' }}&gt;11 / 14&lt;/Text&gt;&#10;    &lt;/Box&gt;&#10;&lt;/Slide&gt;&#10;"/>
+        <p:cNvPr id="47" name="" descr="&lt;Slide style={{ width: 1280, height: 720, background: '#FFFFFF', flexDirection: 'column' }}&gt;&#10;    &lt;Box style={{ width: '100%', height: 8, background: '#1E4FA8' }} /&gt;&#10;    &lt;Box style={{ flexDirection: 'row', justifyContent: 'space-between', alignItems: 'flex-end', padding: '20px 40px 12px 40px' }}&gt;&#10;        &lt;Text style={{ fontSize: 34, fontWeight: 'bold', color: '#0E3F8C' }}&gt;维度四 · 功能完善性（20 分）&lt;/Text&gt;&#10;        &lt;Text style={{ fontSize: 17, color: '#8B97A8' }}&gt;按评分细则四个子项逐一对齐&lt;/Text&gt;&#10;    &lt;/Box&gt;&#10;    &lt;Box style={{ flex: 1, flexDirection: 'row', gap: 20, padding: '6px 40px 0 40px' }}&gt;&#10;        &lt;Box style={{ flex: 1, background: '#F7F9FC', borderRadius: 10, border: '1px solid #D6DCE5', borderTop: '5px solid #1E4FA8', padding: '22px 22px', justifyContent: 'space-between' }}&gt;&#10;            &lt;Box&gt;&#10;                &lt;Box style={{ flexDirection: 'row', justifyContent: 'space-between', alignItems: 'center' }}&gt;&#10;                    &lt;Text style={{ fontSize: 24, fontWeight: 'bold', color: '#1A2230' }}&gt;功能完成度&lt;/Text&gt;&#10;                    &lt;Box style={{ padding: '4px 12px', background: '#E8EFF8', borderRadius: 14 }}&gt;&#10;                        &lt;Text style={{ fontSize: 16, fontWeight: 'bold', color: '#0E3F8C' }}&gt;8 分&lt;/Text&gt;&#10;                    &lt;/Box&gt;&#10;                &lt;/Box&gt;&#10;                &lt;Text style={{ fontSize: 18, color: '#4A5568', marginTop: 14, lineHeight: 1.6 }}&gt;&#10;                    策划承诺的核心功能全部实现、可现场演示。&lt;span style={{ fontWeight: 'bold', color: '#0E3F8C' }}&gt;10 项能力全部接入对话入口&lt;/span&gt;，一句话即可调用。&#10;                &lt;/Text&gt;&#10;            &lt;/Box&gt;&#10;            &lt;Text style={{ fontSize: 15, color: '#8B97A8', lineHeight: 1.5 }}&gt;挖掘 / 冲突 / 简报 / 计划 / 诊断 / 录入 / 同步 / 书架&lt;/Text&gt;&#10;        &lt;/Box&gt;&#10;        &lt;Box style={{ flex: 1, background: '#F7F9FC', borderRadius: 10, border: '1px solid #D6DCE5', borderTop: '5px solid #1E4FA8', padding: '22px 22px', justifyContent: 'space-between' }}&gt;&#10;            &lt;Box&gt;&#10;                &lt;Box style={{ flexDirection: 'row', justifyContent: 'space-between', alignItems: 'center' }}&gt;&#10;                    &lt;Text style={{ fontSize: 24, fontWeight: 'bold', color: '#1A2230' }}&gt;稳定与容错&lt;/Text&gt;&#10;                    &lt;Box style={{ padding: '4px 12px', background: '#E8EFF8', borderRadius: 14 }}&gt;&#10;                        &lt;Text style={{ fontSize: 16, fontWeight: 'bold', color: '#0E3F8C' }}&gt;5 分&lt;/Text&gt;&#10;                    &lt;/Box&gt;&#10;                &lt;/Box&gt;&#10;                &lt;Text style={{ fontSize: 18, color: '#4A5568', marginTop: 14, lineHeight: 1.6 }}&gt;&#10;                    检索失败自动降级关键词通道；向量模型不可用自动切换哈希兜底；会话过期&lt;span style={{ fontWeight: 'bold', color: '#0E3F8C' }}&gt;静默续期&lt;/span&gt;；异常输入有兜底提示，不裸抛错误。&#10;                &lt;/Text&gt;&#10;            &lt;/Box&gt;&#10;            &lt;Text style={{ fontSize: 15, color: '#8B97A8', lineHeight: 1.5 }}&gt;降级有边界：模拟结果绝不冒充真实结果&lt;/Text&gt;&#10;        &lt;/Box&gt;&#10;        &lt;Box style={{ flex: 1, background: '#F7F9FC', borderRadius: 10, border: '1px solid #D6DCE5', borderTop: '5px solid #1E4FA8', padding: '22px 22px', justifyContent: 'space-between' }}&gt;&#10;            &lt;Box&gt;&#10;                &lt;Box style={{ flexDirection: 'row', justifyContent: 'space-between', alignItems: 'center' }}&gt;&#10;                    &lt;Text style={{ fontSize: 24, fontWeight: 'bold', color: '#1A2230' }}&gt;界面体验&lt;/Text&gt;&#10;                    &lt;Box style={{ padding: '4px 12px', background: '#E8EFF8', borderRadius: 14 }}&gt;&#10;                        &lt;Text style={{ fontSize: 16, fontWeight: 'bold', color: '#0E3F8C' }}&gt;4 分&lt;/Text&gt;&#10;                    &lt;/Box&gt;&#10;                &lt;/Box&gt;&#10;                &lt;Text style={{ fontSize: 18, color: '#4A5568', marginTop: 14, lineHeight: 1.6 }}&gt;&#10;                    登录即落地&lt;span style={{ fontWeight: 'bold', color: '#0E3F8C' }}&gt;对话工作台&lt;/span&gt;，耗时能力先回「进行中」卡、完成后就地改写；9 个功能页全保留，信息直给、无冗余装饰。&#10;                &lt;/Text&gt;&#10;            &lt;/Box&gt;&#10;            &lt;Text style={{ fontSize: 15, color: '#8B97A8', lineHeight: 1.5 }}&gt;结果以卡片回写会话，打开即见最终状态&lt;/Text&gt;&#10;        &lt;/Box&gt;&#10;        &lt;Box style={{ flex: 1, background: '#F7F9FC', borderRadius: 10, border: '1px solid #D6DCE5', borderTop: '5px solid #1E4FA8', padding: '22px 22px', justifyContent: 'space-between' }}&gt;&#10;            &lt;Box&gt;&#10;                &lt;Box style={{ flexDirection: 'row', justifyContent: 'space-between', alignItems: 'center' }}&gt;&#10;                    &lt;Text style={{ fontSize: 24, fontWeight: 'bold', color: '#1A2230' }}&gt;代码质量&lt;/Text&gt;&#10;                    &lt;Box style={{ padding: '4px 12px', background: '#E8EFF8', borderRadius: 14 }}&gt;&#10;                        &lt;Text style={{ fontSize: 16, fontWeight: 'bold', color: '#0E3F8C' }}&gt;3 分&lt;/Text&gt;&#10;                    &lt;/Box&gt;&#10;                &lt;/Box&gt;&#10;                &lt;Text style={{ fontSize: 18, color: '#4A5568', marginTop: 14, lineHeight: 1.6 }}&gt;&#10;                    分层清晰（网关 / 领域 / 能力 / 前端），仓储层结构性强制账号隔离；&lt;span style={{ fontWeight: 'bold', color: '#0E3F8C' }}&gt;647 项测试全绿&lt;/span&gt;、提交粒度真实、20 条复盘沉淀。&#10;                &lt;/Text&gt;&#10;            &lt;/Box&gt;&#10;            &lt;Text style={{ fontSize: 15, color: '#8B97A8', lineHeight: 1.5 }}&gt;测试全程模拟调用，不联网、秒级可回归&lt;/Text&gt;&#10;        &lt;/Box&gt;&#10;    &lt;/Box&gt;&#10;    &lt;Box style={{ margin: '16px 40px 0 40px', padding: '14px 24px', background: '#0E3F8C', borderRadius: 8 }}&gt;&#10;        &lt;Text style={{ fontSize: 20, color: '#FFFFFF', textAlign: 'center' }}&gt;&#10;            稳定性的底气来自工程习惯：每一次降级都设计过边界，每一个静默失败都被写进复盘并加了测试断言&#10;        &lt;/Text&gt;&#10;    &lt;/Box&gt;&#10;    &lt;Box style={{ flexDirection: 'row', justifyContent: 'space-between', alignItems: 'center', padding: '10px 40px 14px 40px' }}&gt;&#10;        &lt;Text style={{ fontSize: 14, color: '#8B97A8' }}&gt;认知副驾 · Cognitive Copilot&lt;/Text&gt;&#10;        &lt;Text style={{ fontSize: 14, color: '#1E4FA8' }}&gt;11 / 14&lt;/Text&gt;&#10;    &lt;/Box&gt;&#10;&lt;/Slide&gt;&#10;"/>
         <p:cNvGrpSpPr/>
         <p:nvPr/>
       </p:nvGrpSpPr>
@@ -3535,7 +3625,7 @@
         <p:spPr>
           <a:xfrm rot="0" flipH="0" flipV="0">
             <a:off x="3495675" y="1495425"/>
-            <a:ext cx="2295525" cy="1323975"/>
+            <a:ext cx="2295525" cy="1647825"/>
           </a:xfrm>
           <a:prstGeom prst="rect"/>
         </p:spPr>
@@ -3557,7 +3647,7 @@
                 <a:latin typeface="Microsoft YaHei"/>
                 <a:ea typeface="Microsoft YaHei"/>
               </a:rPr>
-              <a:t>模型故障自动切备用供应商；检索失败降级关键词通道；会话过期</a:t>
+              <a:t>检索失败自动降级关键词通道；向量模型不可用自动切换哈希兜底；会话过期</a:t>
             </a:r>
             <a:r>
               <a:rPr lang="zh-CN" sz="1350" b="1">
@@ -4447,7 +4537,7 @@
   <p:cSld>
     <p:spTree>
       <p:nvGrpSpPr>
-        <p:cNvPr id="84" name="" descr="&lt;Slide style={{ width: 1280, height: 720, background: '#FFFFFF', flexDirection: 'column' }}&gt;&#10;    &lt;Box style={{ width: '100%', height: 8, background: '#1E4FA8' }} /&gt;&#10;    &lt;Box style={{ flexDirection: 'row', justifyContent: 'space-between', alignItems: 'flex-end', padding: '20px 40px 12px 40px' }}&gt;&#10;        &lt;Text style={{ fontSize: 34, fontWeight: 'bold', color: '#0E3F8C' }}&gt;维度五 · 开发工作量（10 分）&lt;/Text&gt;&#10;        &lt;Text style={{ fontSize: 17, color: '#8B97A8' }}&gt;规模 · 过程 · 迭代深度&lt;/Text&gt;&#10;    &lt;/Box&gt;&#10;    &lt;Box style={{ flex: 1, padding: '4px 40px 0 40px', flexDirection: 'column', justifyContent: 'space-between' }}&gt;&#10;        &lt;Table&#10;            style={{ width: 1200, height: 252 }}&#10;            defaultTextStyle={{ fontSize: 17, textAlign: 'center', color: '#1A2230' }}&#10;            defaultCellStyle={{&#10;                border: {&#10;                    left: { width: 1, color: '#D6DCE5' },&#10;                    right: { width: 1, color: '#D6DCE5' },&#10;                    top: { width: 1, color: '#D6DCE5' },&#10;                    bottom: { width: 1, color: '#D6DCE5' },&#10;                },&#10;                background: { color: '#FFFFFF' },&#10;            }}&#10;            cells={[&#10;                [&#10;                    { text: '阶段', textStyle: { bold: true, color: '#FFFFFF', fontSize: 17 }, cellStyle: { background: { color: '#0E3F8C' } } },&#10;                    { text: '时间', textStyle: { bold: true, color: '#FFFFFF', fontSize: 17 }, cellStyle: { background: { color: '#0E3F8C' } } },&#10;                    { text: '测试规模', textStyle: { bold: true, color: '#FFFFFF', fontSize: 17 }, cellStyle: { background: { color: '#0E3F8C' } } },&#10;                    { text: '关键进展', textStyle: { bold: true, color: '#FFFFFF', fontSize: 17 }, cellStyle: { background: { color: '#0E3F8C' } } },&#10;                ],&#10;                [&#10;                    { text: '骨架验证 → 能力闭环', textStyle: { bold: true, fontSize: 16 } },&#10;                    { text: '09-06 → 09-21', textStyle: { fontSize: 16 } },&#10;                    { text: '7 → 299 项', textStyle: { bold: true, color: '#1E4FA8', fontSize: 16 } },&#10;                    { text: '五层能力全部闭环；阅读器（txt/epub/pdf）＋微信读书同步；认证、任务框架、推送调度', textStyle: { textAlign: 'left', fontSize: 15 } },&#10;                ],&#10;                [&#10;                    { text: '对话收口 → 双层重做', textStyle: { bold: true, fontSize: 16 }, cellStyle: { background: { color: '#F7F9FC' } } },&#10;                    { text: '09-21 → 09-23', textStyle: { fontSize: 16 }, cellStyle: { background: { color: '#F7F9FC' } } },&#10;                    { text: '299 → 522 项', textStyle: { bold: true, color: '#1E4FA8', fontSize: 16 }, cellStyle: { background: { color: '#F7F9FC' } } },&#10;                    { text: '10 项能力全部接入对话；模型层双供应商链；检索层库内重构＋评估护栏', textStyle: { textAlign: 'left', fontSize: 15 }, cellStyle: { background: { color: '#F7F9FC' } } },&#10;                ],&#10;                [&#10;                    { text: '判定增强 → 自主性', textStyle: { bold: true, fontSize: 16 } },&#10;                    { text: '09-24 → 09-29', textStyle: { fontSize: 16 } },&#10;                    { text: '522 → 647 项', textStyle: { bold: true, color: '#1E4FA8', fontSize: 16 } },&#10;                    { text: 'L2 置信度校准＋复核机制；4 本真书影子主张链路；自动巡检、事件反应、学习教练', textStyle: { textAlign: 'left', fontSize: 15 } },&#10;                ],&#10;            ]}&#10;        /&gt;&#10;        &lt;Box style={{ flexDirection: 'row', gap: 18 }}&gt;&#10;            &lt;Box style={{ flex: 1, padding: '16px 20px', background: '#F0F5FC', borderRadius: 8, borderLeft: '4px solid #1E4FA8' }}&gt;&#10;                &lt;Text style={{ fontSize: 18, color: '#1A2230', lineHeight: 1.55 }}&gt;&#10;                    &lt;span style={{ fontWeight: 'bold', color: '#0E3F8C' }}&gt;中期检查已达标：&lt;/span&gt;第 10 周时五层能力与阅读链路均已可用，完成度远超 50% 计分线；当前核心功能全部可演示。&#10;                &lt;/Text&gt;&#10;            &lt;/Box&gt;&#10;            &lt;Box style={{ flex: 1, padding: '16px 20px', background: '#F0F5FC', borderRadius: 8, borderLeft: '4px solid #1E4FA8' }}&gt;&#10;                &lt;Text style={{ fontSize: 18, color: '#1A2230', lineHeight: 1.55 }}&gt;&#10;                    &lt;span style={{ fontWeight: 'bold', color: '#0E3F8C' }}&gt;迭代有深度：&lt;/span&gt;判定质量真实评测四轮，回归承诺「不低于基线 0.83」并已兑现；每轮迭代伴随功能增强、性能优化与缺陷修复。&#10;                &lt;/Text&gt;&#10;            &lt;/Box&gt;&#10;        &lt;/Box&gt;&#10;        &lt;Box style={{ padding: '14px 22px', background: '#F7F9FC', borderRadius: 8, border: '1px solid #D6DCE5', marginBottom: 6 }}&gt;&#10;            &lt;Text style={{ fontSize: 18, color: '#1A2230', lineHeight: 1.6 }}&gt;&#10;                &lt;span style={{ fontWeight: 'bold', color: '#0E3F8C' }}&gt;关于 AI 辅助开发：&lt;/span&gt;全程使用 AI 辅助编程，但每一行代码经 647 项测试、每日开发日志与 20 条复盘文档把关——原理说得清、改动可追溯，这正是「投入过程」可核查的证据。&#10;            &lt;/Text&gt;&#10;        &lt;/Box&gt;&#10;    &lt;/Box&gt;&#10;    &lt;Box style={{ flexDirection: 'row', justifyContent: 'space-between', alignItems: 'center', padding: '12px 40px 16px 40px' }}&gt;&#10;        &lt;Text style={{ fontSize: 14, color: '#8B97A8' }}&gt;认知副驾 · Cognitive Copilot&lt;/Text&gt;&#10;        &lt;Text style={{ fontSize: 14, color: '#1E4FA8' }}&gt;12 / 14&lt;/Text&gt;&#10;    &lt;/Box&gt;&#10;&lt;/Slide&gt;&#10;"/>
+        <p:cNvPr id="84" name="" descr="&lt;Slide style={{ width: 1280, height: 720, background: '#FFFFFF', flexDirection: 'column' }}&gt;&#10;    &lt;Box style={{ width: '100%', height: 8, background: '#1E4FA8' }} /&gt;&#10;    &lt;Box style={{ flexDirection: 'row', justifyContent: 'space-between', alignItems: 'flex-end', padding: '20px 40px 12px 40px' }}&gt;&#10;        &lt;Text style={{ fontSize: 34, fontWeight: 'bold', color: '#0E3F8C' }}&gt;维度五 · 开发工作量（10 分）&lt;/Text&gt;&#10;        &lt;Text style={{ fontSize: 17, color: '#8B97A8' }}&gt;规模 · 过程 · 迭代深度&lt;/Text&gt;&#10;    &lt;/Box&gt;&#10;    &lt;Box style={{ flex: 1, padding: '4px 40px 0 40px', flexDirection: 'column', justifyContent: 'space-between' }}&gt;&#10;        &lt;Table&#10;            style={{ width: 1200, height: 252 }}&#10;            defaultTextStyle={{ fontSize: 17, textAlign: 'center', color: '#1A2230' }}&#10;            defaultCellStyle={{&#10;                border: {&#10;                    left: { width: 1, color: '#D6DCE5' },&#10;                    right: { width: 1, color: '#D6DCE5' },&#10;                    top: { width: 1, color: '#D6DCE5' },&#10;                    bottom: { width: 1, color: '#D6DCE5' },&#10;                },&#10;                background: { color: '#FFFFFF' },&#10;            }}&#10;            cells={[&#10;                [&#10;                    { text: '阶段', textStyle: { bold: true, color: '#FFFFFF', fontSize: 17 }, cellStyle: { background: { color: '#0E3F8C' } } },&#10;                    { text: '时间', textStyle: { bold: true, color: '#FFFFFF', fontSize: 17 }, cellStyle: { background: { color: '#0E3F8C' } } },&#10;                    { text: '测试规模', textStyle: { bold: true, color: '#FFFFFF', fontSize: 17 }, cellStyle: { background: { color: '#0E3F8C' } } },&#10;                    { text: '关键进展', textStyle: { bold: true, color: '#FFFFFF', fontSize: 17 }, cellStyle: { background: { color: '#0E3F8C' } } },&#10;                ],&#10;                [&#10;                    { text: '骨架验证 → 能力闭环', textStyle: { bold: true, fontSize: 16 } },&#10;                    { text: '09-06 → 09-21', textStyle: { fontSize: 16 } },&#10;                    { text: '7 → 299 项', textStyle: { bold: true, color: '#1E4FA8', fontSize: 16 } },&#10;                    { text: '五层能力全部闭环；阅读器（txt/epub/pdf）＋微信读书同步；认证、任务框架、推送调度', textStyle: { textAlign: 'left', fontSize: 15 } },&#10;                ],&#10;                [&#10;                    { text: '对话收口 → 双层重做', textStyle: { bold: true, fontSize: 16 }, cellStyle: { background: { color: '#F7F9FC' } } },&#10;                    { text: '09-21 → 09-23', textStyle: { fontSize: 16 }, cellStyle: { background: { color: '#F7F9FC' } } },&#10;                    { text: '299 → 522 项', textStyle: { bold: true, color: '#1E4FA8', fontSize: 16 }, cellStyle: { background: { color: '#F7F9FC' } } },&#10;                    { text: '10 项能力全部接入对话；检索层库内重构＋pgvector 向量库＋评估护栏', textStyle: { textAlign: 'left', fontSize: 15 }, cellStyle: { background: { color: '#F7F9FC' } } },&#10;                ],&#10;                [&#10;                    { text: '判定增强 → 自主性', textStyle: { bold: true, fontSize: 16 } },&#10;                    { text: '09-24 → 09-29', textStyle: { fontSize: 16 } },&#10;                    { text: '522 → 647 项', textStyle: { bold: true, color: '#1E4FA8', fontSize: 16 } },&#10;                    { text: 'L2 置信度校准＋复核机制；4 本真书影子主张链路；自动巡检、事件反应、学习教练', textStyle: { textAlign: 'left', fontSize: 15 } },&#10;                ],&#10;            ]}&#10;        /&gt;&#10;        &lt;Box style={{ flexDirection: 'row', gap: 18 }}&gt;&#10;            &lt;Box style={{ flex: 1, padding: '16px 20px', background: '#F0F5FC', borderRadius: 8, borderLeft: '4px solid #1E4FA8' }}&gt;&#10;                &lt;Text style={{ fontSize: 18, color: '#1A2230', lineHeight: 1.55 }}&gt;&#10;                    &lt;span style={{ fontWeight: 'bold', color: '#0E3F8C' }}&gt;中期检查已达标：&lt;/span&gt;第 10 周时五层能力与阅读链路均已可用，完成度远超 50% 计分线；当前核心功能全部可演示。&#10;                &lt;/Text&gt;&#10;            &lt;/Box&gt;&#10;            &lt;Box style={{ flex: 1, padding: '16px 20px', background: '#F0F5FC', borderRadius: 8, borderLeft: '4px solid #1E4FA8' }}&gt;&#10;                &lt;Text style={{ fontSize: 18, color: '#1A2230', lineHeight: 1.55 }}&gt;&#10;                    &lt;span style={{ fontWeight: 'bold', color: '#0E3F8C' }}&gt;迭代有深度：&lt;/span&gt;判定质量真实评测四轮，回归承诺「不低于基线 0.83」并已兑现；每轮迭代伴随功能增强、性能优化与缺陷修复。&#10;                &lt;/Text&gt;&#10;            &lt;/Box&gt;&#10;        &lt;/Box&gt;&#10;        &lt;Box style={{ padding: '14px 22px', background: '#F7F9FC', borderRadius: 8, border: '1px solid #D6DCE5', marginBottom: 6 }}&gt;&#10;            &lt;Text style={{ fontSize: 18, color: '#1A2230', lineHeight: 1.6 }}&gt;&#10;                &lt;span style={{ fontWeight: 'bold', color: '#0E3F8C' }}&gt;关于 AI 辅助开发：&lt;/span&gt;全程使用 AI 辅助编程，但每一处改动经 647 项测试、每日开发日志与 20 条复盘文档把关——原理说得清、改动可追溯，这正是「投入过程」可核查的证据。&#10;            &lt;/Text&gt;&#10;        &lt;/Box&gt;&#10;    &lt;/Box&gt;&#10;    &lt;Box style={{ flexDirection: 'row', justifyContent: 'space-between', alignItems: 'center', padding: '12px 40px 16px 40px' }}&gt;&#10;        &lt;Text style={{ fontSize: 14, color: '#8B97A8' }}&gt;认知副驾 · Cognitive Copilot&lt;/Text&gt;&#10;        &lt;Text style={{ fontSize: 14, color: '#1E4FA8' }}&gt;12 / 14&lt;/Text&gt;&#10;    &lt;/Box&gt;&#10;&lt;/Slide&gt;&#10;"/>
         <p:cNvGrpSpPr/>
         <p:nvPr/>
       </p:nvGrpSpPr>
@@ -5184,7 +5274,7 @@
                           <a:latin typeface="Microsoft YaHei"/>
                           <a:ea typeface="Microsoft YaHei"/>
                         </a:rPr>
-                        <a:t>10 项能力全部接入对话；模型层双供应商链；检索层库内重构＋评估护栏</a:t>
+                        <a:t>10 项能力全部接入对话；检索层库内重构＋pgvector 向量库＋评估护栏</a:t>
                       </a:r>
                       <a:endParaRPr/>
                     </a:p>
@@ -5812,7 +5902,7 @@
                 <a:latin typeface="Microsoft YaHei"/>
                 <a:ea typeface="Microsoft YaHei"/>
               </a:rPr>
-              <a:t>辅助编程，但每一行代码经</a:t>
+              <a:t>辅助编程，但每一处改动经</a:t>
             </a:r>
             <a:r>
               <a:rPr lang="en-US" sz="1350">
@@ -10886,7 +10976,7 @@
   <p:cSld>
     <p:spTree>
       <p:nvGrpSpPr>
-        <p:cNvPr id="227" name="" descr="&lt;Slide style={{ width: 1280, height: 720, background: '#FFFFFF', flexDirection: 'column' }}&gt;&#10;    &lt;Box style={{ width: '100%', height: 8, background: '#1E4FA8' }} /&gt;&#10;    &lt;Box style={{ flexDirection: 'row', justifyContent: 'space-between', alignItems: 'flex-end', padding: '18px 40px 10px 40px' }}&gt;&#10;        &lt;Text style={{ fontSize: 34, fontWeight: 'bold', color: '#0E3F8C' }}&gt;24 天 · 从 0 到可用系统&lt;/Text&gt;&#10;        &lt;Text style={{ fontSize: 17, color: '#8B97A8' }}&gt;2026-09-06 首次提交 → 09-29&lt;/Text&gt;&#10;    &lt;/Box&gt;&#10;    &lt;Box style={{ flex: 1, flexDirection: 'row', gap: 40, padding: '6px 40px 0 40px', alignItems: 'center' }}&gt;&#10;        &lt;Box style={{ width: 470, height: 430, background: '#0E3F8C', borderRadius: 12, padding: '44px 44px', justifyContent: 'space-between' }}&gt;&#10;            &lt;Box&gt;&#10;                &lt;Text style={{ fontSize: 22, color: '#9FBCE8', letterSpacing: 2 }}&gt;Git 提交&lt;/Text&gt;&#10;                &lt;Text style={{ fontSize: 132, fontWeight: 'bold', color: '#FFFFFF', lineHeight: 1.05, marginTop: 8 }}&gt;154&lt;/Text&gt;&#10;                &lt;Text style={{ fontSize: 24, color: '#FFC107', fontWeight: 'bold', marginTop: 4 }}&gt;次&lt;/Text&gt;&#10;            &lt;/Box&gt;&#10;            &lt;Text style={{ fontSize: 21, color: '#E8EFF8', lineHeight: 1.7 }}&gt;&#10;                其中 &lt;span style={{ fontWeight: 'bold', color: '#FFC107' }}&gt;20 天&lt;/span&gt;有提交记录，粒度真实、主题明确——过程可追溯，工作量可核查。&#10;            &lt;/Text&gt;&#10;        &lt;/Box&gt;&#10;        &lt;Box style={{ flex: 1, height: 430, flexDirection: 'column', justifyContent: 'space-between' }}&gt;&#10;            &lt;Box style={{ flexDirection: 'row', alignItems: 'flex-end', gap: 20, padding: '0 0 18px 0', borderBottom: '2px solid #E8EFF8' }}&gt;&#10;                &lt;Text style={{ fontSize: 76, fontWeight: 'bold', color: '#1E4FA8', lineHeight: 1 }}&gt;647&lt;/Text&gt;&#10;                &lt;Text style={{ fontSize: 22, color: '#4A5568', paddingBottom: 8 }}&gt;项自动化测试全绿&lt;/Text&gt;&#10;                &lt;Text style={{ fontSize: 20, color: '#8B97A8', paddingBottom: 8, marginLeft: 'auto' }}&gt;起点 7 项 · 92 倍&lt;/Text&gt;&#10;            &lt;/Box&gt;&#10;            &lt;Box style={{ flexDirection: 'row', alignItems: 'flex-end', gap: 20, padding: '0 0 18px 0', borderBottom: '2px solid #E8EFF8' }}&gt;&#10;                &lt;Text style={{ fontSize: 76, fontWeight: 'bold', color: '#1E4FA8', lineHeight: 1 }}&gt;2.6&lt;span style={{ fontSize: 40 }}&gt;万行&lt;/span&gt;&lt;/Text&gt;&#10;                &lt;Text style={{ fontSize: 22, color: '#4A5568', paddingBottom: 8 }}&gt;代码总量&lt;/Text&gt;&#10;                &lt;Text style={{ fontSize: 20, color: '#8B97A8', paddingBottom: 8, marginLeft: 'auto' }}&gt;后端 122 文件 · 测试 55 文件 · 前端 13 页&lt;/Text&gt;&#10;            &lt;/Box&gt;&#10;            &lt;Box style={{ flexDirection: 'row', alignItems: 'flex-end', gap: 20 }}&gt;&#10;                &lt;Text style={{ fontSize: 76, fontWeight: 'bold', color: '#1E4FA8', lineHeight: 1 }}&gt;5&lt;span style={{ fontSize: 40 }}&gt; 层&lt;/span&gt;&lt;/Text&gt;&#10;                &lt;Text style={{ fontSize: 22, color: '#4A5568', paddingBottom: 8 }}&gt;能力全部闭环 L1–L5&lt;/Text&gt;&#10;                &lt;Text style={{ fontSize: 20, color: '#8B97A8', paddingBottom: 8, marginLeft: 'auto' }}&gt;46 个接口 · 15+ 张数据表&lt;/Text&gt;&#10;            &lt;/Box&gt;&#10;        &lt;/Box&gt;&#10;    &lt;/Box&gt;&#10;    &lt;Box style={{ margin: '12px 40px 0 40px', padding: '14px 26px', background: '#F0F5FC', borderRadius: 8, borderLeft: '5px solid #1E4FA8' }}&gt;&#10;        &lt;Text style={{ fontSize: 21, color: '#1A2230', lineHeight: 1.6 }}&gt;&#10;            &lt;span style={{ fontWeight: 'bold', color: '#0E3F8C' }}&gt;这个规模的含义：&lt;/span&gt;不是最后一周突击出来的，而是 24 天里每天都有提交、测试与开发日志的持续迭代——工作量维度可以直接按提交记录核查。&#10;        &lt;/Text&gt;&#10;    &lt;/Box&gt;&#10;    &lt;Box style={{ flexDirection: 'row', justifyContent: 'space-between', alignItems: 'center', padding: '12px 40px 16px 40px' }}&gt;&#10;        &lt;Text style={{ fontSize: 14, color: '#8B97A8' }}&gt;认知副驾 · Cognitive Copilot&lt;/Text&gt;&#10;        &lt;Text style={{ fontSize: 14, color: '#1E4FA8' }}&gt;05 / 14&lt;/Text&gt;&#10;    &lt;/Box&gt;&#10;&lt;/Slide&gt;&#10;"/>
+        <p:cNvPr id="227" name="" descr="&lt;Slide style={{ width: 1280, height: 720, background: '#FFFFFF', flexDirection: 'column' }}&gt;&#10;    &lt;Box style={{ width: '100%', height: 8, background: '#1E4FA8' }} /&gt;&#10;    &lt;Box style={{ flexDirection: 'row', justifyContent: 'space-between', alignItems: 'flex-end', padding: '18px 40px 10px 40px' }}&gt;&#10;        &lt;Text style={{ fontSize: 34, fontWeight: 'bold', color: '#0E3F8C' }}&gt;24 天 · 从 0 到可用系统&lt;/Text&gt;&#10;        &lt;Text style={{ fontSize: 17, color: '#8B97A8' }}&gt;2026-09-06 首次提交 → 09-29&lt;/Text&gt;&#10;    &lt;/Box&gt;&#10;    &lt;Box style={{ flex: 1, flexDirection: 'row', gap: 40, padding: '6px 40px 0 40px', alignItems: 'center' }}&gt;&#10;        &lt;Box style={{ width: 470, height: 430, background: '#0E3F8C', borderRadius: 12, padding: '44px 44px', justifyContent: 'space-between' }}&gt;&#10;            &lt;Box&gt;&#10;                &lt;Text style={{ fontSize: 22, color: '#9FBCE8', letterSpacing: 2 }}&gt;Git 提交&lt;/Text&gt;&#10;                &lt;Text style={{ fontSize: 132, fontWeight: 'bold', color: '#FFFFFF', lineHeight: 1.05, marginTop: 8 }}&gt;154&lt;/Text&gt;&#10;                &lt;Text style={{ fontSize: 24, color: '#FFC107', fontWeight: 'bold', marginTop: 4 }}&gt;次&lt;/Text&gt;&#10;            &lt;/Box&gt;&#10;            &lt;Text style={{ fontSize: 21, color: '#E8EFF8', lineHeight: 1.7 }}&gt;&#10;                其中 &lt;span style={{ fontWeight: 'bold', color: '#FFC107' }}&gt;20 天&lt;/span&gt;有提交记录，粒度真实、主题明确——过程可追溯，工作量可核查。&#10;            &lt;/Text&gt;&#10;        &lt;/Box&gt;&#10;        &lt;Box style={{ flex: 1, height: 430, flexDirection: 'column', justifyContent: 'space-between' }}&gt;&#10;            &lt;Box style={{ flexDirection: 'row', alignItems: 'flex-end', gap: 20, padding: '0 0 18px 0', borderBottom: '2px solid #E8EFF8' }}&gt;&#10;                &lt;Text style={{ fontSize: 76, fontWeight: 'bold', color: '#1E4FA8', lineHeight: 1 }}&gt;647&lt;/Text&gt;&#10;                &lt;Text style={{ fontSize: 22, color: '#4A5568', paddingBottom: 8 }}&gt;项自动化测试全绿&lt;/Text&gt;&#10;                &lt;Text style={{ fontSize: 20, color: '#8B97A8', paddingBottom: 8, marginLeft: 'auto' }}&gt;起点 7 项 · 92 倍&lt;/Text&gt;&#10;            &lt;/Box&gt;&#10;            &lt;Box style={{ flexDirection: 'row', alignItems: 'flex-end', gap: 20, padding: '0 0 18px 0', borderBottom: '2px solid #E8EFF8' }}&gt;&#10;                &lt;Text style={{ fontSize: 76, fontWeight: 'bold', color: '#1E4FA8', lineHeight: 1 }}&gt;10&lt;span style={{ fontSize: 40 }}&gt; 项&lt;/span&gt;&lt;/Text&gt;&#10;                &lt;Text style={{ fontSize: 22, color: '#4A5568', paddingBottom: 8 }}&gt;能力全部接入对话入口&lt;/Text&gt;&#10;                &lt;Text style={{ fontSize: 20, color: '#8B97A8', paddingBottom: 8, marginLeft: 'auto' }}&gt;对话即入口 · 一句话调用&lt;/Text&gt;&#10;            &lt;/Box&gt;&#10;            &lt;Box style={{ flexDirection: 'row', alignItems: 'flex-end', gap: 20 }}&gt;&#10;                &lt;Text style={{ fontSize: 76, fontWeight: 'bold', color: '#1E4FA8', lineHeight: 1 }}&gt;5&lt;span style={{ fontSize: 40 }}&gt; 层&lt;/span&gt;&lt;/Text&gt;&#10;                &lt;Text style={{ fontSize: 22, color: '#4A5568', paddingBottom: 8 }}&gt;能力全部闭环 L1–L5&lt;/Text&gt;&#10;                &lt;Text style={{ fontSize: 20, color: '#8B97A8', paddingBottom: 8, marginLeft: 'auto' }}&gt;46 个接口 · 15+ 张数据表&lt;/Text&gt;&#10;            &lt;/Box&gt;&#10;        &lt;/Box&gt;&#10;    &lt;/Box&gt;&#10;    &lt;Box style={{ margin: '12px 40px 0 40px', padding: '14px 26px', background: '#F0F5FC', borderRadius: 8, borderLeft: '5px solid #1E4FA8' }}&gt;&#10;        &lt;Text style={{ fontSize: 21, color: '#1A2230', lineHeight: 1.6 }}&gt;&#10;            &lt;span style={{ fontWeight: 'bold', color: '#0E3F8C' }}&gt;这个规模的含义：&lt;/span&gt;不是最后一周突击出来的，而是 24 天里每天都有提交、测试与开发日志的持续迭代——工作量维度可以直接按提交记录核查。&#10;        &lt;/Text&gt;&#10;    &lt;/Box&gt;&#10;    &lt;Box style={{ flexDirection: 'row', justifyContent: 'space-between', alignItems: 'center', padding: '12px 40px 16px 40px' }}&gt;&#10;        &lt;Text style={{ fontSize: 14, color: '#8B97A8' }}&gt;认知副驾 · Cognitive Copilot&lt;/Text&gt;&#10;        &lt;Text style={{ fontSize: 14, color: '#1E4FA8' }}&gt;05 / 14&lt;/Text&gt;&#10;    &lt;/Box&gt;&#10;&lt;/Slide&gt;&#10;"/>
         <p:cNvGrpSpPr/>
         <p:nvPr/>
       </p:nvGrpSpPr>
@@ -11538,7 +11628,7 @@
         <p:spPr>
           <a:xfrm rot="0" flipH="0" flipV="0">
             <a:off x="5238750" y="2600325"/>
-            <a:ext cx="1857375" cy="876300"/>
+            <a:ext cx="1390650" cy="876300"/>
           </a:xfrm>
           <a:prstGeom prst="rect"/>
         </p:spPr>
@@ -11558,7 +11648,17 @@
                 <a:latin typeface="Microsoft YaHei"/>
                 <a:ea typeface="Microsoft YaHei"/>
               </a:rPr>
-              <a:t>2.6</a:t>
+              <a:t>10</a:t>
+            </a:r>
+            <a:r>
+              <a:rPr lang="en-US" sz="3000" b="1">
+                <a:solidFill>
+                  <a:srgbClr val="1E4FA8"/>
+                </a:solidFill>
+                <a:latin typeface="Microsoft YaHei"/>
+                <a:ea typeface="Microsoft YaHei"/>
+              </a:rPr>
+              <a:t> </a:t>
             </a:r>
             <a:r>
               <a:rPr lang="zh-CN" sz="3000" b="1">
@@ -11568,7 +11668,7 @@
                 <a:latin typeface="Microsoft YaHei"/>
                 <a:ea typeface="Microsoft YaHei"/>
               </a:rPr>
-              <a:t>万行</a:t>
+              <a:t>项</a:t>
             </a:r>
             <a:endParaRPr/>
           </a:p>
@@ -11582,8 +11682,8 @@
         </p:nvSpPr>
         <p:spPr>
           <a:xfrm rot="0" flipH="0" flipV="0">
-            <a:off x="7286625" y="3143250"/>
-            <a:ext cx="828675" cy="333375"/>
+            <a:off x="6819900" y="3143250"/>
+            <a:ext cx="2095500" cy="333375"/>
           </a:xfrm>
           <a:prstGeom prst="rect"/>
         </p:spPr>
@@ -11603,7 +11703,7 @@
                 <a:latin typeface="Microsoft YaHei"/>
                 <a:ea typeface="Microsoft YaHei"/>
               </a:rPr>
-              <a:t>代码总量</a:t>
+              <a:t>能力全部接入对话入口</a:t>
             </a:r>
             <a:endParaRPr/>
           </a:p>
@@ -11617,8 +11717,8 @@
         </p:nvSpPr>
         <p:spPr>
           <a:xfrm rot="0" flipH="0" flipV="0">
-            <a:off x="8305800" y="3171825"/>
-            <a:ext cx="3505200" cy="304800"/>
+            <a:off x="9744075" y="3171825"/>
+            <a:ext cx="2066925" cy="304800"/>
           </a:xfrm>
           <a:prstGeom prst="rect"/>
         </p:spPr>
@@ -11638,7 +11738,7 @@
                 <a:latin typeface="Microsoft YaHei"/>
                 <a:ea typeface="Microsoft YaHei"/>
               </a:rPr>
-              <a:t>后端</a:t>
+              <a:t>对话即入口</a:t>
             </a:r>
             <a:r>
               <a:rPr lang="en-US" sz="1500">
@@ -11648,7 +11748,7 @@
                 <a:latin typeface="Microsoft YaHei"/>
                 <a:ea typeface="Microsoft YaHei"/>
               </a:rPr>
-              <a:t> 122 </a:t>
+              <a:t> · </a:t>
             </a:r>
             <a:r>
               <a:rPr lang="zh-CN" sz="1500">
@@ -11658,87 +11758,7 @@
                 <a:latin typeface="Microsoft YaHei"/>
                 <a:ea typeface="Microsoft YaHei"/>
               </a:rPr>
-              <a:t>文件</a:t>
-            </a:r>
-            <a:r>
-              <a:rPr lang="en-US" sz="1500">
-                <a:solidFill>
-                  <a:srgbClr val="8B97A8"/>
-                </a:solidFill>
-                <a:latin typeface="Microsoft YaHei"/>
-                <a:ea typeface="Microsoft YaHei"/>
-              </a:rPr>
-              <a:t> · </a:t>
-            </a:r>
-            <a:r>
-              <a:rPr lang="zh-CN" sz="1500">
-                <a:solidFill>
-                  <a:srgbClr val="8B97A8"/>
-                </a:solidFill>
-                <a:latin typeface="Microsoft YaHei"/>
-                <a:ea typeface="Microsoft YaHei"/>
-              </a:rPr>
-              <a:t>测试</a:t>
-            </a:r>
-            <a:r>
-              <a:rPr lang="en-US" sz="1500">
-                <a:solidFill>
-                  <a:srgbClr val="8B97A8"/>
-                </a:solidFill>
-                <a:latin typeface="Microsoft YaHei"/>
-                <a:ea typeface="Microsoft YaHei"/>
-              </a:rPr>
-              <a:t> 55 </a:t>
-            </a:r>
-            <a:r>
-              <a:rPr lang="zh-CN" sz="1500">
-                <a:solidFill>
-                  <a:srgbClr val="8B97A8"/>
-                </a:solidFill>
-                <a:latin typeface="Microsoft YaHei"/>
-                <a:ea typeface="Microsoft YaHei"/>
-              </a:rPr>
-              <a:t>文件</a:t>
-            </a:r>
-            <a:r>
-              <a:rPr lang="en-US" sz="1500">
-                <a:solidFill>
-                  <a:srgbClr val="8B97A8"/>
-                </a:solidFill>
-                <a:latin typeface="Microsoft YaHei"/>
-                <a:ea typeface="Microsoft YaHei"/>
-              </a:rPr>
-              <a:t> · </a:t>
-            </a:r>
-            <a:r>
-              <a:rPr lang="zh-CN" sz="1500">
-                <a:solidFill>
-                  <a:srgbClr val="8B97A8"/>
-                </a:solidFill>
-                <a:latin typeface="Microsoft YaHei"/>
-                <a:ea typeface="Microsoft YaHei"/>
-              </a:rPr>
-              <a:t>前端</a:t>
-            </a:r>
-            <a:r>
-              <a:rPr lang="en-US" sz="1500">
-                <a:solidFill>
-                  <a:srgbClr val="8B97A8"/>
-                </a:solidFill>
-                <a:latin typeface="Microsoft YaHei"/>
-                <a:ea typeface="Microsoft YaHei"/>
-              </a:rPr>
-              <a:t> 13 </a:t>
-            </a:r>
-            <a:r>
-              <a:rPr lang="zh-CN" sz="1500">
-                <a:solidFill>
-                  <a:srgbClr val="8B97A8"/>
-                </a:solidFill>
-                <a:latin typeface="Microsoft YaHei"/>
-                <a:ea typeface="Microsoft YaHei"/>
-              </a:rPr>
-              <a:t>页</a:t>
+              <a:t>一句话调用</a:t>
             </a:r>
             <a:endParaRPr/>
           </a:p>
@@ -13964,7 +13984,7 @@
   <p:cSld>
     <p:spTree>
       <p:nvGrpSpPr>
-        <p:cNvPr id="304" name="" descr="&lt;Slide style={{ width: 1280, height: 720, background: '#FFFFFF', flexDirection: 'column' }}&gt;&#10;    &lt;Box style={{ width: '100%', height: 8, background: '#1E4FA8' }} /&gt;&#10;    &lt;Box style={{ flex: 1, flexDirection: 'row', gap: 28, padding: '24px 40px 0 40px' }}&gt;&#10;        &lt;Box style={{ width: 330, height: 590, background: '#0E3F8C', borderRadius: 10, padding: '36px 30px', justifyContent: 'space-between' }}&gt;&#10;            &lt;Box&gt;&#10;                &lt;Text style={{ fontSize: 18, color: '#9FBCE8', letterSpacing: 3 }}&gt;维度一&lt;/Text&gt;&#10;                &lt;Text style={{ fontSize: 40, fontWeight: 'bold', color: '#FFFFFF', marginTop: 12 }}&gt;实用性&lt;/Text&gt;&#10;                &lt;Box style={{ flexDirection: 'row', alignItems: 'flex-end', gap: 8, marginTop: 18 }}&gt;&#10;                    &lt;Text style={{ fontSize: 64, fontWeight: 'bold', color: '#FFC107', lineHeight: 1 }}&gt;20&lt;/Text&gt;&#10;                    &lt;Text style={{ fontSize: 22, color: '#BBD0F0', paddingBottom: 6 }}&gt;分&lt;/Text&gt;&#10;                &lt;/Box&gt;&#10;            &lt;/Box&gt;&#10;            &lt;Text style={{ fontSize: 21, color: '#E8EFF8', lineHeight: 1.75 }}&gt;&#10;                做得实的标准不是功能多，而是&lt;span style={{ fontWeight: 'bold', color: '#FFC107' }}&gt;每天真的在用&lt;/span&gt;：&#10;                数据源是真的、阅读量是真的、行为记录是真的。&#10;            &lt;/Text&gt;&#10;        &lt;/Box&gt;&#10;        &lt;Box style={{ flex: 1, flexDirection: 'column', justifyContent: 'space-between', padding: '4px 0' }}&gt;&#10;            &lt;Box style={{ flexDirection: 'row', alignItems: 'center', gap: 20, padding: '22px 26px', background: '#F7F9FC', borderRadius: 10, border: '1px solid #D6DCE5' }}&gt;&#10;                &lt;Box style={{ width: 60, height: 60, background: '#E8EFF8', borderRadius: 12, justifyContent: 'center', alignItems: 'center' }}&gt;&#10;                    &lt;FAIcon name='sync' style={{ fill: '#1E4FA8', width: 30, height: 30 }} /&gt;&#10;                &lt;/Box&gt;&#10;                &lt;Box style={{ flex: 1 }}&gt;&#10;                    &lt;Text style={{ fontSize: 24, fontWeight: 'bold', color: '#1A2230' }}&gt;真实数据源：微信读书官方接口同步&lt;/Text&gt;&#10;                    &lt;Text style={{ fontSize: 19, color: '#4A5568', marginTop: 6, lineHeight: 1.55 }}&gt;&#10;                        划线、想法、书评按官方只读接口进知识库，幂等去重、可跳回原文——与手写笔记同等参与后续全部能力&#10;                    &lt;/Text&gt;&#10;                &lt;/Box&gt;&#10;            &lt;/Box&gt;&#10;            &lt;Box style={{ flexDirection: 'row', alignItems: 'center', gap: 20, padding: '22px 26px', background: '#F7F9FC', borderRadius: 10, border: '1px solid #D6DCE5' }}&gt;&#10;                &lt;Box style={{ width: 60, height: 60, background: '#E8EFF8', borderRadius: 12, justifyContent: 'center', alignItems: 'center' }}&gt;&#10;                    &lt;FAIcon name='book' style={{ fill: '#1E4FA8', width: 30, height: 30 }} /&gt;&#10;                &lt;/Box&gt;&#10;                &lt;Box style={{ flex: 1 }}&gt;&#10;                    &lt;Text style={{ fontSize: 24, fontWeight: 'bold', color: '#1A2230' }}&gt;真实阅读量：4 本完整通读的书籍&lt;/Text&gt;&#10;                    &lt;Text style={{ fontSize: 19, color: '#4A5568', marginTop: 6, lineHeight: 1.55 }}&gt;&#10;                        单本最高 20.8 万字、零截断；txt / epub / pdf 解析成章节，阅读进度与划词想法全部落库&#10;                    &lt;/Text&gt;&#10;                &lt;/Box&gt;&#10;            &lt;/Box&gt;&#10;            &lt;Box style={{ flexDirection: 'row', alignItems: 'center', gap: 20, padding: '22px 26px', background: '#F7F9FC', borderRadius: 10, border: '1px solid #D6DCE5' }}&gt;&#10;                &lt;Box style={{ width: 60, height: 60, background: '#E8EFF8', borderRadius: 12, justifyContent: 'center', alignItems: 'center' }}&gt;&#10;                    &lt;FAIcon name='database' style={{ fill: '#1E4FA8', width: 30, height: 30 }} /&gt;&#10;                &lt;/Box&gt;&#10;                &lt;Box style={{ flex: 1 }}&gt;&#10;                    &lt;Text style={{ fontSize: 24, fontWeight: 'bold', color: '#1A2230' }}&gt;真实行为数据：支撑五层能力运转&lt;/Text&gt;&#10;                    &lt;Text style={{ fontSize: 19, color: '#4A5568', marginTop: 6, lineHeight: 1.55 }}&gt;&#10;                        知识条目、观点主张、589 条学习行为事件持续入库（09-23 快照），L1–L5 每一层都在真实数据上跑&#10;                    &lt;/Text&gt;&#10;                &lt;/Box&gt;&#10;            &lt;/Box&gt;&#10;            &lt;Box style={{ padding: '16px 24px', background: '#F0F5FC', borderRadius: 8, borderLeft: '5px solid #1E4FA8' }}&gt;&#10;                &lt;Text style={{ fontSize: 20, color: '#1A2230', lineHeight: 1.6 }}&gt;&#10;                    &lt;span style={{ fontWeight: 'bold', color: '#0E3F8C' }}&gt;佐证：&lt;/span&gt;项目连续 21 天开发日志、每日真实使用轨迹——这个系统先服务了开发者自己，才谈得上智能。&#10;                &lt;/Text&gt;&#10;            &lt;/Box&gt;&#10;        &lt;/Box&gt;&#10;    &lt;/Box&gt;&#10;    &lt;Box style={{ flexDirection: 'row', justifyContent: 'space-between', alignItems: 'center', padding: '12px 40px 16px 40px' }}&gt;&#10;        &lt;Text style={{ fontSize: 14, color: '#8B97A8' }}&gt;认知副驾 · Cognitive Copilot&lt;/Text&gt;&#10;        &lt;Text style={{ fontSize: 14, color: '#1E4FA8' }}&gt;08 / 14&lt;/Text&gt;&#10;    &lt;/Box&gt;&#10;&lt;/Slide&gt;&#10;"/>
+        <p:cNvPr id="304" name="" descr="&lt;Slide style={{ width: 1280, height: 720, background: '#FFFFFF', flexDirection: 'column' }}&gt;&#10;    &lt;Box style={{ width: '100%', height: 8, background: '#1E4FA8' }} /&gt;&#10;    &lt;Box style={{ flex: 1, flexDirection: 'row', gap: 28, padding: '24px 40px 0 40px' }}&gt;&#10;        &lt;Box style={{ width: 330, height: 590, background: '#0E3F8C', borderRadius: 10, padding: '36px 30px', justifyContent: 'space-between' }}&gt;&#10;            &lt;Box&gt;&#10;                &lt;Text style={{ fontSize: 18, color: '#9FBCE8', letterSpacing: 3 }}&gt;维度一&lt;/Text&gt;&#10;                &lt;Text style={{ fontSize: 40, fontWeight: 'bold', color: '#FFFFFF', marginTop: 12 }}&gt;实用性&lt;/Text&gt;&#10;                &lt;Box style={{ flexDirection: 'row', alignItems: 'flex-end', gap: 8, marginTop: 18 }}&gt;&#10;                    &lt;Text style={{ fontSize: 64, fontWeight: 'bold', color: '#FFC107', lineHeight: 1 }}&gt;20&lt;/Text&gt;&#10;                    &lt;Text style={{ fontSize: 22, color: '#BBD0F0', paddingBottom: 6 }}&gt;分&lt;/Text&gt;&#10;                &lt;/Box&gt;&#10;            &lt;/Box&gt;&#10;            &lt;Text style={{ fontSize: 21, color: '#E8EFF8', lineHeight: 1.75 }}&gt;&#10;                做得实的标准不是功能多，而是&lt;span style={{ fontWeight: 'bold', color: '#FFC107' }}&gt;每天真的在用&lt;/span&gt;：&#10;                数据源是真的、阅读量是真的、行为记录是真的。&#10;            &lt;/Text&gt;&#10;        &lt;/Box&gt;&#10;        &lt;Box style={{ flex: 1, flexDirection: 'column', justifyContent: 'space-between', padding: '4px 0' }}&gt;&#10;            &lt;Box style={{ padding: '10px 20px', background: '#FAFBFD', borderRadius: 10, border: '2px dashed #B0B9C8', alignItems: 'center', justifyContent: 'center', height: 112 }}&gt;&#10;                &lt;FAIcon name='image' style={{ fill: '#B0B9C8', width: 26, height: 26 }} /&gt;&#10;                &lt;Text style={{ fontSize: 19, fontWeight: 'bold', color: '#8B97A8', marginTop: 5 }}&gt;【预留】此处插入系统演示截图&lt;/Text&gt;&#10;                &lt;Text style={{ fontSize: 15, color: '#A8B2C0', marginTop: 3 }}&gt;对话工作台 · 能力卡片 · 微信读书同步界面&lt;/Text&gt;&#10;            &lt;/Box&gt;&#10;            &lt;Box style={{ flexDirection: 'row', alignItems: 'center', gap: 20, padding: '14px 22px', background: '#F7F9FC', borderRadius: 10, border: '1px solid #D6DCE5' }}&gt;&#10;                &lt;Box style={{ width: 60, height: 60, background: '#E8EFF8', borderRadius: 12, justifyContent: 'center', alignItems: 'center' }}&gt;&#10;                    &lt;FAIcon name='sync' style={{ fill: '#1E4FA8', width: 30, height: 30 }} /&gt;&#10;                &lt;/Box&gt;&#10;                &lt;Box style={{ flex: 1 }}&gt;&#10;                    &lt;Text style={{ fontSize: 24, fontWeight: 'bold', color: '#1A2230' }}&gt;真实数据源：微信读书官方接口同步&lt;/Text&gt;&#10;                    &lt;Text style={{ fontSize: 19, color: '#4A5568', marginTop: 6, lineHeight: 1.55 }}&gt;&#10;                        划线、想法、书评按官方只读接口进知识库，幂等去重、可跳回原文——与手写笔记同等参与后续全部能力&#10;                    &lt;/Text&gt;&#10;                &lt;/Box&gt;&#10;            &lt;/Box&gt;&#10;            &lt;Box style={{ flexDirection: 'row', alignItems: 'center', gap: 20, padding: '14px 22px', background: '#F7F9FC', borderRadius: 10, border: '1px solid #D6DCE5' }}&gt;&#10;                &lt;Box style={{ width: 60, height: 60, background: '#E8EFF8', borderRadius: 12, justifyContent: 'center', alignItems: 'center' }}&gt;&#10;                    &lt;FAIcon name='book' style={{ fill: '#1E4FA8', width: 30, height: 30 }} /&gt;&#10;                &lt;/Box&gt;&#10;                &lt;Box style={{ flex: 1 }}&gt;&#10;                    &lt;Text style={{ fontSize: 24, fontWeight: 'bold', color: '#1A2230' }}&gt;真实阅读量：4 本完整通读的书籍&lt;/Text&gt;&#10;                    &lt;Text style={{ fontSize: 19, color: '#4A5568', marginTop: 6, lineHeight: 1.55 }}&gt;&#10;                        单本最高 20.8 万字、零截断；txt / epub / pdf 解析成章节，阅读进度与划词想法全部落库&#10;                    &lt;/Text&gt;&#10;                &lt;/Box&gt;&#10;            &lt;/Box&gt;&#10;            &lt;Box style={{ flexDirection: 'row', alignItems: 'center', gap: 20, padding: '14px 22px', background: '#F7F9FC', borderRadius: 10, border: '1px solid #D6DCE5' }}&gt;&#10;                &lt;Box style={{ width: 60, height: 60, background: '#E8EFF8', borderRadius: 12, justifyContent: 'center', alignItems: 'center' }}&gt;&#10;                    &lt;FAIcon name='database' style={{ fill: '#1E4FA8', width: 30, height: 30 }} /&gt;&#10;                &lt;/Box&gt;&#10;                &lt;Box style={{ flex: 1 }}&gt;&#10;                    &lt;Text style={{ fontSize: 24, fontWeight: 'bold', color: '#1A2230' }}&gt;真实行为数据：支撑五层能力运转&lt;/Text&gt;&#10;                    &lt;Text style={{ fontSize: 19, color: '#4A5568', marginTop: 6, lineHeight: 1.55 }}&gt;&#10;                        知识条目、观点主张、589 条学习行为事件持续入库（09-23 快照），L1–L5 每一层都在真实数据上跑&#10;                    &lt;/Text&gt;&#10;                &lt;/Box&gt;&#10;            &lt;/Box&gt;&#10;            &lt;Box style={{ padding: '12px 20px', background: '#F0F5FC', borderRadius: 8, borderLeft: '5px solid #1E4FA8' }}&gt;&#10;                &lt;Text style={{ fontSize: 20, color: '#1A2230', lineHeight: 1.6 }}&gt;&#10;                    &lt;span style={{ fontWeight: 'bold', color: '#0E3F8C' }}&gt;佐证：&lt;/span&gt;项目连续 21 天开发日志、每日真实使用轨迹——这个系统先服务了开发者自己，才谈得上智能。&#10;                &lt;/Text&gt;&#10;            &lt;/Box&gt;&#10;        &lt;/Box&gt;&#10;    &lt;/Box&gt;&#10;    &lt;Box style={{ flexDirection: 'row', justifyContent: 'space-between', alignItems: 'center', padding: '12px 40px 16px 40px' }}&gt;&#10;        &lt;Text style={{ fontSize: 14, color: '#8B97A8' }}&gt;认知副驾 · Cognitive Copilot&lt;/Text&gt;&#10;        &lt;Text style={{ fontSize: 14, color: '#1E4FA8' }}&gt;08 / 14&lt;/Text&gt;&#10;    &lt;/Box&gt;&#10;&lt;/Slide&gt;&#10;"/>
         <p:cNvGrpSpPr/>
         <p:nvPr/>
       </p:nvGrpSpPr>
@@ -14276,21 +14296,21 @@
         <p:spPr>
           <a:xfrm rot="0" flipH="0" flipV="0">
             <a:off x="3790950" y="342900"/>
-            <a:ext cx="8020050" cy="1428750"/>
+            <a:ext cx="8020050" cy="1066800"/>
           </a:xfrm>
           <a:prstGeom prst="roundRect">
             <a:avLst>
-              <a:gd name="adj" fmla="val 6667"/>
+              <a:gd name="adj" fmla="val 8929"/>
             </a:avLst>
           </a:prstGeom>
           <a:solidFill>
-            <a:srgbClr val="F7F9FC"/>
+            <a:srgbClr val="FAFBFD"/>
           </a:solidFill>
-          <a:ln w="12700">
+          <a:ln w="25400">
             <a:solidFill>
-              <a:srgbClr val="D6DCE5"/>
+              <a:srgbClr val="B0B9C8"/>
             </a:solidFill>
-            <a:prstDash val="solid"/>
+            <a:prstDash val="dash"/>
           </a:ln>
         </p:spPr>
         <p:txBody>
@@ -14298,35 +14318,9 @@
           <a:p/>
         </p:txBody>
       </p:sp>
-      <p:sp>
-        <p:nvSpPr>
-          <p:cNvPr id="314" name=""/>
-          <p:cNvSpPr/>
-          <p:nvPr/>
-        </p:nvSpPr>
-        <p:spPr>
-          <a:xfrm rot="0" flipH="0" flipV="0">
-            <a:off x="4038600" y="771525"/>
-            <a:ext cx="571500" cy="571500"/>
-          </a:xfrm>
-          <a:prstGeom prst="roundRect">
-            <a:avLst>
-              <a:gd name="adj" fmla="val 20000"/>
-            </a:avLst>
-          </a:prstGeom>
-          <a:solidFill>
-            <a:srgbClr val="E8EFF8"/>
-          </a:solidFill>
-          <a:ln/>
-        </p:spPr>
-        <p:txBody>
-          <a:bodyPr/>
-          <a:p/>
-        </p:txBody>
-      </p:sp>
       <p:pic>
         <p:nvPicPr>
-          <p:cNvPr id="315" name=""/>
+          <p:cNvPr id="314" name=""/>
           <p:cNvPicPr>
             <a:picLocks noChangeAspect="1"/>
           </p:cNvPicPr>
@@ -14346,8 +14340,8 @@
         </p:blipFill>
         <p:spPr>
           <a:xfrm rot="0" flipH="0" flipV="0">
-            <a:off x="4181475" y="914400"/>
-            <a:ext cx="285750" cy="285750"/>
+            <a:off x="7677150" y="523875"/>
+            <a:ext cx="247650" cy="247650"/>
           </a:xfrm>
           <a:prstGeom prst="rect">
             <a:avLst/>
@@ -14357,14 +14351,49 @@
       </p:pic>
       <p:sp>
         <p:nvSpPr>
+          <p:cNvPr id="315" name="" descr="{&quot;isTemplate&quot;:true,&quot;type&quot;:&quot;text&quot;}"/>
+          <p:cNvSpPr txBox="1"/>
+          <p:nvPr/>
+        </p:nvSpPr>
+        <p:spPr>
+          <a:xfrm rot="0" flipH="0" flipV="0">
+            <a:off x="6534150" y="819150"/>
+            <a:ext cx="2533650" cy="219075"/>
+          </a:xfrm>
+          <a:prstGeom prst="rect"/>
+        </p:spPr>
+        <p:txBody>
+          <a:bodyPr wrap="none" lIns="0" tIns="0" rIns="0" bIns="0"/>
+          <a:p>
+            <a:pPr>
+              <a:lnSpc>
+                <a:spcPct val="100000"/>
+              </a:lnSpc>
+            </a:pPr>
+            <a:r>
+              <a:rPr lang="zh-CN" sz="1425" b="1">
+                <a:solidFill>
+                  <a:srgbClr val="8B97A8"/>
+                </a:solidFill>
+                <a:latin typeface="Microsoft YaHei"/>
+                <a:ea typeface="Microsoft YaHei"/>
+              </a:rPr>
+              <a:t>【预留】此处插入系统演示截图</a:t>
+            </a:r>
+            <a:endParaRPr/>
+          </a:p>
+        </p:txBody>
+      </p:sp>
+      <p:sp>
+        <p:nvSpPr>
           <p:cNvPr id="316" name="" descr="{&quot;isTemplate&quot;:true,&quot;type&quot;:&quot;text&quot;}"/>
           <p:cNvSpPr txBox="1"/>
           <p:nvPr/>
         </p:nvSpPr>
         <p:spPr>
           <a:xfrm rot="0" flipH="0" flipV="0">
-            <a:off x="4800600" y="552450"/>
-            <a:ext cx="6762750" cy="276225"/>
+            <a:off x="6467475" y="1066800"/>
+            <a:ext cx="2667000" cy="171450"/>
           </a:xfrm>
           <a:prstGeom prst="rect"/>
         </p:spPr>
@@ -14377,70 +14406,73 @@
               </a:lnSpc>
             </a:pPr>
             <a:r>
-              <a:rPr lang="zh-CN" sz="1800" b="1">
-                <a:solidFill>
-                  <a:srgbClr val="1A2230"/>
-                </a:solidFill>
-                <a:latin typeface="Microsoft YaHei"/>
-                <a:ea typeface="Microsoft YaHei"/>
-              </a:rPr>
-              <a:t>真实数据源：微信读书官方接口同步</a:t>
-            </a:r>
-            <a:endParaRPr/>
-          </a:p>
-        </p:txBody>
-      </p:sp>
-      <p:sp>
-        <p:nvSpPr>
-          <p:cNvPr id="317" name="" descr="{&quot;isTemplate&quot;:true,&quot;type&quot;:&quot;text&quot;}"/>
-          <p:cNvSpPr txBox="1"/>
-          <p:nvPr/>
-        </p:nvSpPr>
-        <p:spPr>
-          <a:xfrm rot="0" flipH="0" flipV="0">
-            <a:off x="4800600" y="885825"/>
-            <a:ext cx="6762750" cy="676275"/>
-          </a:xfrm>
-          <a:prstGeom prst="rect"/>
-        </p:spPr>
-        <p:txBody>
-          <a:bodyPr wrap="square" lIns="0" tIns="0" rIns="0" bIns="0">
-            <a:normAutofit/>
-          </a:bodyPr>
-          <a:p>
-            <a:pPr>
-              <a:lnSpc>
-                <a:spcPct val="155000"/>
-              </a:lnSpc>
-            </a:pPr>
-            <a:r>
-              <a:rPr lang="zh-CN" sz="1425">
-                <a:solidFill>
-                  <a:srgbClr val="4A5568"/>
-                </a:solidFill>
-                <a:latin typeface="Microsoft YaHei"/>
-                <a:ea typeface="Microsoft YaHei"/>
-              </a:rPr>
-              <a:t>划线、想法、书评按官方只读接口进知识库，幂等去重、可跳回原文——与手写笔记同等参与后续全部能力</a:t>
-            </a:r>
-            <a:endParaRPr/>
-          </a:p>
-        </p:txBody>
-      </p:sp>
-      <p:sp>
-        <p:nvSpPr>
-          <p:cNvPr id="318" name=""/>
+              <a:rPr lang="zh-CN" sz="1125">
+                <a:solidFill>
+                  <a:srgbClr val="A8B2C0"/>
+                </a:solidFill>
+                <a:latin typeface="Microsoft YaHei"/>
+                <a:ea typeface="Microsoft YaHei"/>
+              </a:rPr>
+              <a:t>对话工作台</a:t>
+            </a:r>
+            <a:r>
+              <a:rPr lang="en-US" sz="1125">
+                <a:solidFill>
+                  <a:srgbClr val="A8B2C0"/>
+                </a:solidFill>
+                <a:latin typeface="Microsoft YaHei"/>
+                <a:ea typeface="Microsoft YaHei"/>
+              </a:rPr>
+              <a:t> · </a:t>
+            </a:r>
+            <a:r>
+              <a:rPr lang="zh-CN" sz="1125">
+                <a:solidFill>
+                  <a:srgbClr val="A8B2C0"/>
+                </a:solidFill>
+                <a:latin typeface="Microsoft YaHei"/>
+                <a:ea typeface="Microsoft YaHei"/>
+              </a:rPr>
+              <a:t>能力卡片</a:t>
+            </a:r>
+            <a:r>
+              <a:rPr lang="en-US" sz="1125">
+                <a:solidFill>
+                  <a:srgbClr val="A8B2C0"/>
+                </a:solidFill>
+                <a:latin typeface="Microsoft YaHei"/>
+                <a:ea typeface="Microsoft YaHei"/>
+              </a:rPr>
+              <a:t> · </a:t>
+            </a:r>
+            <a:r>
+              <a:rPr lang="zh-CN" sz="1125">
+                <a:solidFill>
+                  <a:srgbClr val="A8B2C0"/>
+                </a:solidFill>
+                <a:latin typeface="Microsoft YaHei"/>
+                <a:ea typeface="Microsoft YaHei"/>
+              </a:rPr>
+              <a:t>微信读书同步界面</a:t>
+            </a:r>
+            <a:endParaRPr/>
+          </a:p>
+        </p:txBody>
+      </p:sp>
+      <p:sp>
+        <p:nvSpPr>
+          <p:cNvPr id="317" name=""/>
           <p:cNvSpPr/>
           <p:nvPr/>
         </p:nvSpPr>
         <p:spPr>
           <a:xfrm rot="0" flipH="0" flipV="0">
-            <a:off x="3790950" y="2009775"/>
-            <a:ext cx="8020050" cy="1428750"/>
+            <a:off x="3790950" y="1457325"/>
+            <a:ext cx="8020050" cy="1276350"/>
           </a:xfrm>
           <a:prstGeom prst="roundRect">
             <a:avLst>
-              <a:gd name="adj" fmla="val 6667"/>
+              <a:gd name="adj" fmla="val 7463"/>
             </a:avLst>
           </a:prstGeom>
           <a:solidFill>
@@ -14460,13 +14492,13 @@
       </p:sp>
       <p:sp>
         <p:nvSpPr>
-          <p:cNvPr id="319" name=""/>
+          <p:cNvPr id="318" name=""/>
           <p:cNvSpPr/>
           <p:nvPr/>
         </p:nvSpPr>
         <p:spPr>
           <a:xfrm rot="0" flipH="0" flipV="0">
-            <a:off x="4038600" y="2438400"/>
+            <a:off x="4000500" y="1809750"/>
             <a:ext cx="571500" cy="571500"/>
           </a:xfrm>
           <a:prstGeom prst="roundRect">
@@ -14486,7 +14518,7 @@
       </p:sp>
       <p:pic>
         <p:nvPicPr>
-          <p:cNvPr id="320" name=""/>
+          <p:cNvPr id="319" name=""/>
           <p:cNvPicPr>
             <a:picLocks noChangeAspect="1"/>
           </p:cNvPicPr>
@@ -14506,7 +14538,7 @@
         </p:blipFill>
         <p:spPr>
           <a:xfrm rot="0" flipH="0" flipV="0">
-            <a:off x="4181475" y="2581275"/>
+            <a:off x="4143375" y="1952625"/>
             <a:ext cx="285750" cy="285750"/>
           </a:xfrm>
           <a:prstGeom prst="rect">
@@ -14517,69 +14549,49 @@
       </p:pic>
       <p:sp>
         <p:nvSpPr>
+          <p:cNvPr id="320" name="" descr="{&quot;isTemplate&quot;:true,&quot;type&quot;:&quot;text&quot;}"/>
+          <p:cNvSpPr txBox="1"/>
+          <p:nvPr/>
+        </p:nvSpPr>
+        <p:spPr>
+          <a:xfrm rot="0" flipH="0" flipV="0">
+            <a:off x="4762500" y="1590675"/>
+            <a:ext cx="6838950" cy="276225"/>
+          </a:xfrm>
+          <a:prstGeom prst="rect"/>
+        </p:spPr>
+        <p:txBody>
+          <a:bodyPr wrap="none" lIns="0" tIns="0" rIns="0" bIns="0"/>
+          <a:p>
+            <a:pPr>
+              <a:lnSpc>
+                <a:spcPct val="100000"/>
+              </a:lnSpc>
+            </a:pPr>
+            <a:r>
+              <a:rPr lang="zh-CN" sz="1800" b="1">
+                <a:solidFill>
+                  <a:srgbClr val="1A2230"/>
+                </a:solidFill>
+                <a:latin typeface="Microsoft YaHei"/>
+                <a:ea typeface="Microsoft YaHei"/>
+              </a:rPr>
+              <a:t>真实数据源：微信读书官方接口同步</a:t>
+            </a:r>
+            <a:endParaRPr/>
+          </a:p>
+        </p:txBody>
+      </p:sp>
+      <p:sp>
+        <p:nvSpPr>
           <p:cNvPr id="321" name="" descr="{&quot;isTemplate&quot;:true,&quot;type&quot;:&quot;text&quot;}"/>
           <p:cNvSpPr txBox="1"/>
           <p:nvPr/>
         </p:nvSpPr>
         <p:spPr>
           <a:xfrm rot="0" flipH="0" flipV="0">
-            <a:off x="4800600" y="2219325"/>
-            <a:ext cx="6762750" cy="276225"/>
-          </a:xfrm>
-          <a:prstGeom prst="rect"/>
-        </p:spPr>
-        <p:txBody>
-          <a:bodyPr wrap="none" lIns="0" tIns="0" rIns="0" bIns="0"/>
-          <a:p>
-            <a:pPr>
-              <a:lnSpc>
-                <a:spcPct val="100000"/>
-              </a:lnSpc>
-            </a:pPr>
-            <a:r>
-              <a:rPr lang="zh-CN" sz="1800" b="1">
-                <a:solidFill>
-                  <a:srgbClr val="1A2230"/>
-                </a:solidFill>
-                <a:latin typeface="Microsoft YaHei"/>
-                <a:ea typeface="Microsoft YaHei"/>
-              </a:rPr>
-              <a:t>真实阅读量：</a:t>
-            </a:r>
-            <a:r>
-              <a:rPr lang="en-US" sz="1800" b="1">
-                <a:solidFill>
-                  <a:srgbClr val="1A2230"/>
-                </a:solidFill>
-                <a:latin typeface="Microsoft YaHei"/>
-                <a:ea typeface="Microsoft YaHei"/>
-              </a:rPr>
-              <a:t>4 </a:t>
-            </a:r>
-            <a:r>
-              <a:rPr lang="zh-CN" sz="1800" b="1">
-                <a:solidFill>
-                  <a:srgbClr val="1A2230"/>
-                </a:solidFill>
-                <a:latin typeface="Microsoft YaHei"/>
-                <a:ea typeface="Microsoft YaHei"/>
-              </a:rPr>
-              <a:t>本完整通读的书籍</a:t>
-            </a:r>
-            <a:endParaRPr/>
-          </a:p>
-        </p:txBody>
-      </p:sp>
-      <p:sp>
-        <p:nvSpPr>
-          <p:cNvPr id="322" name="" descr="{&quot;isTemplate&quot;:true,&quot;type&quot;:&quot;text&quot;}"/>
-          <p:cNvSpPr txBox="1"/>
-          <p:nvPr/>
-        </p:nvSpPr>
-        <p:spPr>
-          <a:xfrm rot="0" flipH="0" flipV="0">
-            <a:off x="4800600" y="2552700"/>
-            <a:ext cx="6762750" cy="676275"/>
+            <a:off x="4762500" y="1924050"/>
+            <a:ext cx="6838950" cy="676275"/>
           </a:xfrm>
           <a:prstGeom prst="rect"/>
         </p:spPr>
@@ -14601,66 +14613,26 @@
                 <a:latin typeface="Microsoft YaHei"/>
                 <a:ea typeface="Microsoft YaHei"/>
               </a:rPr>
-              <a:t>单本最高</a:t>
-            </a:r>
-            <a:r>
-              <a:rPr lang="en-US" sz="1425">
-                <a:solidFill>
-                  <a:srgbClr val="4A5568"/>
-                </a:solidFill>
-                <a:latin typeface="Microsoft YaHei"/>
-                <a:ea typeface="Microsoft YaHei"/>
-              </a:rPr>
-              <a:t> 20.8 </a:t>
-            </a:r>
-            <a:r>
-              <a:rPr lang="zh-CN" sz="1425">
-                <a:solidFill>
-                  <a:srgbClr val="4A5568"/>
-                </a:solidFill>
-                <a:latin typeface="Microsoft YaHei"/>
-                <a:ea typeface="Microsoft YaHei"/>
-              </a:rPr>
-              <a:t>万字、零截断；</a:t>
-            </a:r>
-            <a:r>
-              <a:rPr lang="en-US" sz="1425">
-                <a:solidFill>
-                  <a:srgbClr val="4A5568"/>
-                </a:solidFill>
-                <a:latin typeface="Microsoft YaHei"/>
-                <a:ea typeface="Microsoft YaHei"/>
-              </a:rPr>
-              <a:t>txt / epub / pdf </a:t>
-            </a:r>
-            <a:r>
-              <a:rPr lang="zh-CN" sz="1425">
-                <a:solidFill>
-                  <a:srgbClr val="4A5568"/>
-                </a:solidFill>
-                <a:latin typeface="Microsoft YaHei"/>
-                <a:ea typeface="Microsoft YaHei"/>
-              </a:rPr>
-              <a:t>解析成章节，阅读进度与划词想法全部落库</a:t>
-            </a:r>
-            <a:endParaRPr/>
-          </a:p>
-        </p:txBody>
-      </p:sp>
-      <p:sp>
-        <p:nvSpPr>
-          <p:cNvPr id="323" name=""/>
+              <a:t>划线、想法、书评按官方只读接口进知识库，幂等去重、可跳回原文——与手写笔记同等参与后续全部能力</a:t>
+            </a:r>
+            <a:endParaRPr/>
+          </a:p>
+        </p:txBody>
+      </p:sp>
+      <p:sp>
+        <p:nvSpPr>
+          <p:cNvPr id="322" name=""/>
           <p:cNvSpPr/>
           <p:nvPr/>
         </p:nvSpPr>
         <p:spPr>
           <a:xfrm rot="0" flipH="0" flipV="0">
-            <a:off x="3790950" y="3686175"/>
-            <a:ext cx="8020050" cy="1428750"/>
+            <a:off x="3790950" y="2781300"/>
+            <a:ext cx="8020050" cy="1276350"/>
           </a:xfrm>
           <a:prstGeom prst="roundRect">
             <a:avLst>
-              <a:gd name="adj" fmla="val 6667"/>
+              <a:gd name="adj" fmla="val 7463"/>
             </a:avLst>
           </a:prstGeom>
           <a:solidFill>
@@ -14680,13 +14652,13 @@
       </p:sp>
       <p:sp>
         <p:nvSpPr>
-          <p:cNvPr id="324" name=""/>
+          <p:cNvPr id="323" name=""/>
           <p:cNvSpPr/>
           <p:nvPr/>
         </p:nvSpPr>
         <p:spPr>
           <a:xfrm rot="0" flipH="0" flipV="0">
-            <a:off x="4038600" y="4114800"/>
+            <a:off x="4000500" y="3133725"/>
             <a:ext cx="571500" cy="571500"/>
           </a:xfrm>
           <a:prstGeom prst="roundRect">
@@ -14706,7 +14678,7 @@
       </p:sp>
       <p:pic>
         <p:nvPicPr>
-          <p:cNvPr id="325" name=""/>
+          <p:cNvPr id="324" name=""/>
           <p:cNvPicPr>
             <a:picLocks noChangeAspect="1"/>
           </p:cNvPicPr>
@@ -14726,7 +14698,7 @@
         </p:blipFill>
         <p:spPr>
           <a:xfrm rot="0" flipH="0" flipV="0">
-            <a:off x="4181475" y="4257675"/>
+            <a:off x="4143375" y="3276600"/>
             <a:ext cx="285750" cy="285750"/>
           </a:xfrm>
           <a:prstGeom prst="rect">
@@ -14737,49 +14709,69 @@
       </p:pic>
       <p:sp>
         <p:nvSpPr>
+          <p:cNvPr id="325" name="" descr="{&quot;isTemplate&quot;:true,&quot;type&quot;:&quot;text&quot;}"/>
+          <p:cNvSpPr txBox="1"/>
+          <p:nvPr/>
+        </p:nvSpPr>
+        <p:spPr>
+          <a:xfrm rot="0" flipH="0" flipV="0">
+            <a:off x="4762500" y="2914650"/>
+            <a:ext cx="6838950" cy="276225"/>
+          </a:xfrm>
+          <a:prstGeom prst="rect"/>
+        </p:spPr>
+        <p:txBody>
+          <a:bodyPr wrap="none" lIns="0" tIns="0" rIns="0" bIns="0"/>
+          <a:p>
+            <a:pPr>
+              <a:lnSpc>
+                <a:spcPct val="100000"/>
+              </a:lnSpc>
+            </a:pPr>
+            <a:r>
+              <a:rPr lang="zh-CN" sz="1800" b="1">
+                <a:solidFill>
+                  <a:srgbClr val="1A2230"/>
+                </a:solidFill>
+                <a:latin typeface="Microsoft YaHei"/>
+                <a:ea typeface="Microsoft YaHei"/>
+              </a:rPr>
+              <a:t>真实阅读量：</a:t>
+            </a:r>
+            <a:r>
+              <a:rPr lang="en-US" sz="1800" b="1">
+                <a:solidFill>
+                  <a:srgbClr val="1A2230"/>
+                </a:solidFill>
+                <a:latin typeface="Microsoft YaHei"/>
+                <a:ea typeface="Microsoft YaHei"/>
+              </a:rPr>
+              <a:t>4 </a:t>
+            </a:r>
+            <a:r>
+              <a:rPr lang="zh-CN" sz="1800" b="1">
+                <a:solidFill>
+                  <a:srgbClr val="1A2230"/>
+                </a:solidFill>
+                <a:latin typeface="Microsoft YaHei"/>
+                <a:ea typeface="Microsoft YaHei"/>
+              </a:rPr>
+              <a:t>本完整通读的书籍</a:t>
+            </a:r>
+            <a:endParaRPr/>
+          </a:p>
+        </p:txBody>
+      </p:sp>
+      <p:sp>
+        <p:nvSpPr>
           <p:cNvPr id="326" name="" descr="{&quot;isTemplate&quot;:true,&quot;type&quot;:&quot;text&quot;}"/>
           <p:cNvSpPr txBox="1"/>
           <p:nvPr/>
         </p:nvSpPr>
         <p:spPr>
           <a:xfrm rot="0" flipH="0" flipV="0">
-            <a:off x="4800600" y="3895725"/>
-            <a:ext cx="6762750" cy="276225"/>
-          </a:xfrm>
-          <a:prstGeom prst="rect"/>
-        </p:spPr>
-        <p:txBody>
-          <a:bodyPr wrap="none" lIns="0" tIns="0" rIns="0" bIns="0"/>
-          <a:p>
-            <a:pPr>
-              <a:lnSpc>
-                <a:spcPct val="100000"/>
-              </a:lnSpc>
-            </a:pPr>
-            <a:r>
-              <a:rPr lang="zh-CN" sz="1800" b="1">
-                <a:solidFill>
-                  <a:srgbClr val="1A2230"/>
-                </a:solidFill>
-                <a:latin typeface="Microsoft YaHei"/>
-                <a:ea typeface="Microsoft YaHei"/>
-              </a:rPr>
-              <a:t>真实行为数据：支撑五层能力运转</a:t>
-            </a:r>
-            <a:endParaRPr/>
-          </a:p>
-        </p:txBody>
-      </p:sp>
-      <p:sp>
-        <p:nvSpPr>
-          <p:cNvPr id="327" name="" descr="{&quot;isTemplate&quot;:true,&quot;type&quot;:&quot;text&quot;}"/>
-          <p:cNvSpPr txBox="1"/>
-          <p:nvPr/>
-        </p:nvSpPr>
-        <p:spPr>
-          <a:xfrm rot="0" flipH="0" flipV="0">
-            <a:off x="4800600" y="4229100"/>
-            <a:ext cx="6762750" cy="676275"/>
+            <a:off x="4762500" y="3248025"/>
+            <a:ext cx="6838950" cy="676275"/>
           </a:xfrm>
           <a:prstGeom prst="rect"/>
         </p:spPr>
@@ -14801,7 +14793,7 @@
                 <a:latin typeface="Microsoft YaHei"/>
                 <a:ea typeface="Microsoft YaHei"/>
               </a:rPr>
-              <a:t>知识条目、观点主张、</a:t>
+              <a:t>单本最高</a:t>
             </a:r>
             <a:r>
               <a:rPr lang="en-US" sz="1425">
@@ -14811,7 +14803,7 @@
                 <a:latin typeface="Microsoft YaHei"/>
                 <a:ea typeface="Microsoft YaHei"/>
               </a:rPr>
-              <a:t>589 </a:t>
+              <a:t> 20.8 </a:t>
             </a:r>
             <a:r>
               <a:rPr lang="zh-CN" sz="1425">
@@ -14821,7 +14813,7 @@
                 <a:latin typeface="Microsoft YaHei"/>
                 <a:ea typeface="Microsoft YaHei"/>
               </a:rPr>
-              <a:t>条学习行为事件持续入库（</a:t>
+              <a:t>万字、零截断；</a:t>
             </a:r>
             <a:r>
               <a:rPr lang="en-US" sz="1425">
@@ -14831,7 +14823,7 @@
                 <a:latin typeface="Microsoft YaHei"/>
                 <a:ea typeface="Microsoft YaHei"/>
               </a:rPr>
-              <a:t>09-23 </a:t>
+              <a:t>txt / epub / pdf </a:t>
             </a:r>
             <a:r>
               <a:rPr lang="zh-CN" sz="1425">
@@ -14841,30 +14833,41 @@
                 <a:latin typeface="Microsoft YaHei"/>
                 <a:ea typeface="Microsoft YaHei"/>
               </a:rPr>
-              <a:t>快照），</a:t>
-            </a:r>
-            <a:r>
-              <a:rPr lang="en-US" sz="1425">
-                <a:solidFill>
-                  <a:srgbClr val="4A5568"/>
-                </a:solidFill>
-                <a:latin typeface="Microsoft YaHei"/>
-                <a:ea typeface="Microsoft YaHei"/>
-              </a:rPr>
-              <a:t>L1–L5 </a:t>
-            </a:r>
-            <a:r>
-              <a:rPr lang="zh-CN" sz="1425">
-                <a:solidFill>
-                  <a:srgbClr val="4A5568"/>
-                </a:solidFill>
-                <a:latin typeface="Microsoft YaHei"/>
-                <a:ea typeface="Microsoft YaHei"/>
-              </a:rPr>
-              <a:t>每一层都在真实数据上跑</a:t>
-            </a:r>
-            <a:endParaRPr/>
-          </a:p>
+              <a:t>解析成章节，阅读进度与划词想法全部落库</a:t>
+            </a:r>
+            <a:endParaRPr/>
+          </a:p>
+        </p:txBody>
+      </p:sp>
+      <p:sp>
+        <p:nvSpPr>
+          <p:cNvPr id="327" name=""/>
+          <p:cNvSpPr/>
+          <p:nvPr/>
+        </p:nvSpPr>
+        <p:spPr>
+          <a:xfrm rot="0" flipH="0" flipV="0">
+            <a:off x="3790950" y="4105275"/>
+            <a:ext cx="8020050" cy="1276350"/>
+          </a:xfrm>
+          <a:prstGeom prst="roundRect">
+            <a:avLst>
+              <a:gd name="adj" fmla="val 7463"/>
+            </a:avLst>
+          </a:prstGeom>
+          <a:solidFill>
+            <a:srgbClr val="F7F9FC"/>
+          </a:solidFill>
+          <a:ln w="12700">
+            <a:solidFill>
+              <a:srgbClr val="D6DCE5"/>
+            </a:solidFill>
+            <a:prstDash val="solid"/>
+          </a:ln>
+        </p:spPr>
+        <p:txBody>
+          <a:bodyPr/>
+          <a:p/>
         </p:txBody>
       </p:sp>
       <p:sp>
@@ -14875,12 +14878,201 @@
         </p:nvSpPr>
         <p:spPr>
           <a:xfrm rot="0" flipH="0" flipV="0">
-            <a:off x="3838575" y="5353050"/>
-            <a:ext cx="8020050" cy="1038225"/>
+            <a:off x="4000500" y="4457700"/>
+            <a:ext cx="571500" cy="571500"/>
           </a:xfrm>
           <a:prstGeom prst="roundRect">
             <a:avLst>
-              <a:gd name="adj" fmla="val 7339"/>
+              <a:gd name="adj" fmla="val 20000"/>
+            </a:avLst>
+          </a:prstGeom>
+          <a:solidFill>
+            <a:srgbClr val="E8EFF8"/>
+          </a:solidFill>
+          <a:ln/>
+        </p:spPr>
+        <p:txBody>
+          <a:bodyPr/>
+          <a:p/>
+        </p:txBody>
+      </p:sp>
+      <p:pic>
+        <p:nvPicPr>
+          <p:cNvPr id="329" name=""/>
+          <p:cNvPicPr>
+            <a:picLocks noChangeAspect="1"/>
+          </p:cNvPicPr>
+          <p:nvPr/>
+        </p:nvPicPr>
+        <p:blipFill>
+          <a:blip>
+            <a:extLst>
+              <a:ext uri="{96DAC541-7B7A-43D3-8B79-37D633B846F1}">
+                <asvg:svgBlip r:embed="rId4"/>
+              </a:ext>
+            </a:extLst>
+          </a:blip>
+          <a:stretch>
+            <a:fillRect/>
+          </a:stretch>
+        </p:blipFill>
+        <p:spPr>
+          <a:xfrm rot="0" flipH="0" flipV="0">
+            <a:off x="4143375" y="4600575"/>
+            <a:ext cx="285750" cy="285750"/>
+          </a:xfrm>
+          <a:prstGeom prst="rect">
+            <a:avLst/>
+          </a:prstGeom>
+          <a:ln/>
+        </p:spPr>
+      </p:pic>
+      <p:sp>
+        <p:nvSpPr>
+          <p:cNvPr id="330" name="" descr="{&quot;isTemplate&quot;:true,&quot;type&quot;:&quot;text&quot;}"/>
+          <p:cNvSpPr txBox="1"/>
+          <p:nvPr/>
+        </p:nvSpPr>
+        <p:spPr>
+          <a:xfrm rot="0" flipH="0" flipV="0">
+            <a:off x="4762500" y="4238625"/>
+            <a:ext cx="6838950" cy="276225"/>
+          </a:xfrm>
+          <a:prstGeom prst="rect"/>
+        </p:spPr>
+        <p:txBody>
+          <a:bodyPr wrap="none" lIns="0" tIns="0" rIns="0" bIns="0"/>
+          <a:p>
+            <a:pPr>
+              <a:lnSpc>
+                <a:spcPct val="100000"/>
+              </a:lnSpc>
+            </a:pPr>
+            <a:r>
+              <a:rPr lang="zh-CN" sz="1800" b="1">
+                <a:solidFill>
+                  <a:srgbClr val="1A2230"/>
+                </a:solidFill>
+                <a:latin typeface="Microsoft YaHei"/>
+                <a:ea typeface="Microsoft YaHei"/>
+              </a:rPr>
+              <a:t>真实行为数据：支撑五层能力运转</a:t>
+            </a:r>
+            <a:endParaRPr/>
+          </a:p>
+        </p:txBody>
+      </p:sp>
+      <p:sp>
+        <p:nvSpPr>
+          <p:cNvPr id="331" name="" descr="{&quot;isTemplate&quot;:true,&quot;type&quot;:&quot;text&quot;}"/>
+          <p:cNvSpPr txBox="1"/>
+          <p:nvPr/>
+        </p:nvSpPr>
+        <p:spPr>
+          <a:xfrm rot="0" flipH="0" flipV="0">
+            <a:off x="4762500" y="4572000"/>
+            <a:ext cx="6838950" cy="676275"/>
+          </a:xfrm>
+          <a:prstGeom prst="rect"/>
+        </p:spPr>
+        <p:txBody>
+          <a:bodyPr wrap="square" lIns="0" tIns="0" rIns="0" bIns="0">
+            <a:normAutofit/>
+          </a:bodyPr>
+          <a:p>
+            <a:pPr>
+              <a:lnSpc>
+                <a:spcPct val="155000"/>
+              </a:lnSpc>
+            </a:pPr>
+            <a:r>
+              <a:rPr lang="zh-CN" sz="1425">
+                <a:solidFill>
+                  <a:srgbClr val="4A5568"/>
+                </a:solidFill>
+                <a:latin typeface="Microsoft YaHei"/>
+                <a:ea typeface="Microsoft YaHei"/>
+              </a:rPr>
+              <a:t>知识条目、观点主张、</a:t>
+            </a:r>
+            <a:r>
+              <a:rPr lang="en-US" sz="1425">
+                <a:solidFill>
+                  <a:srgbClr val="4A5568"/>
+                </a:solidFill>
+                <a:latin typeface="Microsoft YaHei"/>
+                <a:ea typeface="Microsoft YaHei"/>
+              </a:rPr>
+              <a:t>589 </a:t>
+            </a:r>
+            <a:r>
+              <a:rPr lang="zh-CN" sz="1425">
+                <a:solidFill>
+                  <a:srgbClr val="4A5568"/>
+                </a:solidFill>
+                <a:latin typeface="Microsoft YaHei"/>
+                <a:ea typeface="Microsoft YaHei"/>
+              </a:rPr>
+              <a:t>条学习行为事件持续入库（</a:t>
+            </a:r>
+            <a:r>
+              <a:rPr lang="en-US" sz="1425">
+                <a:solidFill>
+                  <a:srgbClr val="4A5568"/>
+                </a:solidFill>
+                <a:latin typeface="Microsoft YaHei"/>
+                <a:ea typeface="Microsoft YaHei"/>
+              </a:rPr>
+              <a:t>09-23 </a:t>
+            </a:r>
+            <a:r>
+              <a:rPr lang="zh-CN" sz="1425">
+                <a:solidFill>
+                  <a:srgbClr val="4A5568"/>
+                </a:solidFill>
+                <a:latin typeface="Microsoft YaHei"/>
+                <a:ea typeface="Microsoft YaHei"/>
+              </a:rPr>
+              <a:t>快照），</a:t>
+            </a:r>
+            <a:r>
+              <a:rPr lang="en-US" sz="1425">
+                <a:solidFill>
+                  <a:srgbClr val="4A5568"/>
+                </a:solidFill>
+                <a:latin typeface="Microsoft YaHei"/>
+                <a:ea typeface="Microsoft YaHei"/>
+              </a:rPr>
+              <a:t>L1–L5 </a:t>
+            </a:r>
+            <a:r>
+              <a:rPr lang="zh-CN" sz="1425">
+                <a:solidFill>
+                  <a:srgbClr val="4A5568"/>
+                </a:solidFill>
+                <a:latin typeface="Microsoft YaHei"/>
+                <a:ea typeface="Microsoft YaHei"/>
+              </a:rPr>
+              <a:t>每一层都在真实数据上跑</a:t>
+            </a:r>
+            <a:endParaRPr/>
+          </a:p>
+        </p:txBody>
+      </p:sp>
+      <p:sp>
+        <p:nvSpPr>
+          <p:cNvPr id="332" name=""/>
+          <p:cNvSpPr/>
+          <p:nvPr/>
+        </p:nvSpPr>
+        <p:spPr>
+          <a:xfrm rot="0" flipH="0" flipV="0">
+            <a:off x="3838575" y="5429250"/>
+            <a:ext cx="8020050" cy="962025"/>
+          </a:xfrm>
+          <a:prstGeom prst="roundRect">
+            <a:avLst>
+              <a:gd name="adj" fmla="val 7921"/>
             </a:avLst>
           </a:prstGeom>
           <a:solidFill>
@@ -14895,18 +15087,18 @@
       </p:sp>
       <p:sp>
         <p:nvSpPr>
-          <p:cNvPr id="329" name=""/>
+          <p:cNvPr id="333" name=""/>
           <p:cNvSpPr/>
           <p:nvPr/>
         </p:nvSpPr>
         <p:spPr>
           <a:xfrm rot="0" flipH="0" flipV="0">
-            <a:off x="3838575" y="5353050"/>
-            <a:ext cx="8020050" cy="1038225"/>
+            <a:off x="3838575" y="5429250"/>
+            <a:ext cx="8020050" cy="962025"/>
           </a:xfrm>
           <a:custGeom>
             <a:pathLst>
-              <a:path w="842" h="109">
+              <a:path w="842" h="101">
                 <a:moveTo>
                   <a:pt x="8" y="0"/>
                 </a:moveTo>
@@ -14916,17 +15108,17 @@
                   <a:pt x="5" y="3"/>
                 </a:cubicBezTo>
                 <a:lnTo>
-                  <a:pt x="5" y="106"/>
+                  <a:pt x="5" y="98"/>
                 </a:lnTo>
                 <a:cubicBezTo>
-                  <a:pt x="5" y="108"/>
-                  <a:pt x="6" y="109"/>
-                  <a:pt x="8" y="109"/>
+                  <a:pt x="5" y="100"/>
+                  <a:pt x="6" y="101"/>
+                  <a:pt x="8" y="101"/>
                 </a:cubicBezTo>
                 <a:cubicBezTo>
-                  <a:pt x="3" y="109"/>
-                  <a:pt x="0" y="105"/>
-                  <a:pt x="0" y="101"/>
+                  <a:pt x="3" y="101"/>
+                  <a:pt x="0" y="97"/>
+                  <a:pt x="0" y="93"/>
                 </a:cubicBezTo>
                 <a:lnTo>
                   <a:pt x="0" y="8"/>
@@ -14952,14 +15144,14 @@
       </p:sp>
       <p:sp>
         <p:nvSpPr>
-          <p:cNvPr id="330" name="" descr="{&quot;isTemplate&quot;:true,&quot;type&quot;:&quot;text&quot;}"/>
-          <p:cNvSpPr txBox="1"/>
-          <p:nvPr/>
-        </p:nvSpPr>
-        <p:spPr>
-          <a:xfrm rot="0" flipH="0" flipV="0">
-            <a:off x="4067175" y="5505450"/>
-            <a:ext cx="7515225" cy="733425"/>
+          <p:cNvPr id="334" name="" descr="{&quot;isTemplate&quot;:true,&quot;type&quot;:&quot;text&quot;}"/>
+          <p:cNvSpPr txBox="1"/>
+          <p:nvPr/>
+        </p:nvSpPr>
+        <p:spPr>
+          <a:xfrm rot="0" flipH="0" flipV="0">
+            <a:off x="4029075" y="5543550"/>
+            <a:ext cx="7591425" cy="733425"/>
           </a:xfrm>
           <a:prstGeom prst="rect"/>
         </p:spPr>
@@ -15019,7 +15211,7 @@
       </p:sp>
       <p:sp>
         <p:nvSpPr>
-          <p:cNvPr id="331" name="" descr="{&quot;isTemplate&quot;:true,&quot;type&quot;:&quot;text&quot;}"/>
+          <p:cNvPr id="335" name="" descr="{&quot;isTemplate&quot;:true,&quot;type&quot;:&quot;text&quot;}"/>
           <p:cNvSpPr txBox="1"/>
           <p:nvPr/>
         </p:nvSpPr>
@@ -15064,7 +15256,7 @@
       </p:sp>
       <p:sp>
         <p:nvSpPr>
-          <p:cNvPr id="332" name="" descr="{&quot;isTemplate&quot;:true,&quot;type&quot;:&quot;text&quot;}"/>
+          <p:cNvPr id="336" name="" descr="{&quot;isTemplate&quot;:true,&quot;type&quot;:&quot;text&quot;}"/>
           <p:cNvSpPr txBox="1"/>
           <p:nvPr/>
         </p:nvSpPr>
@@ -15107,7 +15299,7 @@
   <p:cSld>
     <p:spTree>
       <p:nvGrpSpPr>
-        <p:cNvPr id="333" name="" descr="&lt;Slide style={{ width: 1280, height: 720, background: '#FFFFFF', flexDirection: 'column' }}&gt;&#10;    &lt;Box style={{ width: '100%', height: 8, background: '#1E4FA8' }} /&gt;&#10;    &lt;Box style={{ flexDirection: 'row', justifyContent: 'space-between', alignItems: 'flex-end', padding: '20px 40px 12px 40px' }}&gt;&#10;        &lt;Text style={{ fontSize: 34, fontWeight: 'bold', color: '#0E3F8C' }}&gt;维度二 · 创新性（15 分）：和现有方案比，好在哪里&lt;/Text&gt;&#10;        &lt;Text style={{ fontSize: 17, color: '#8B97A8' }}&gt;结构对比 · 不靠名词&lt;/Text&gt;&#10;    &lt;/Box&gt;&#10;    &lt;Box style={{ flex: 1, flexDirection: 'row', gap: 26, padding: '6px 40px 0 40px' }}&gt;&#10;        &lt;Box style={{ width: 730, flexDirection: 'column' }}&gt;&#10;            &lt;Table&#10;                style={{ width: 730, height: 356 }}&#10;                defaultTextStyle={{ fontSize: 17, textAlign: 'center', color: '#1A2230' }}&#10;                defaultCellStyle={{&#10;                    border: {&#10;                        left: { width: 1, color: '#D6DCE5' },&#10;                        right: { width: 1, color: '#D6DCE5' },&#10;                        top: { width: 1, color: '#D6DCE5' },&#10;                        bottom: { width: 1, color: '#D6DCE5' },&#10;                    },&#10;                    background: { color: '#FFFFFF' },&#10;                }}&#10;                cells={[&#10;                    [&#10;                        { text: '判定问题', textStyle: { bold: true, color: '#FFFFFF', fontSize: 17 }, cellStyle: { background: { color: '#0E3F8C' } } },&#10;                        { text: '网页 AI（豆包类）', textStyle: { bold: true, color: '#FFFFFF', fontSize: 17 }, cellStyle: { background: { color: '#0E3F8C' } } },&#10;                        { text: '笔记软件（Notion 类）', textStyle: { bold: true, color: '#FFFFFF', fontSize: 17 }, cellStyle: { background: { color: '#0E3F8C' } } },&#10;                        { text: '认知副驾', textStyle: { bold: true, color: '#FFC107', fontSize: 17 }, cellStyle: { background: { color: '#0E3F8C' } } },&#10;                    ],&#10;                    [&#10;                        { text: '有跨会话的持久状态？', textStyle: { textAlign: 'left', fontSize: 16 } },&#10;                        { text: '✗ 对话完就忘', textStyle: { color: '#D9534F', fontSize: 16 } },&#10;                        { text: '△ 只存内容', textStyle: { color: '#B8860B', fontSize: 16 } },&#10;                        { text: '✓ 知识＋观点＋行为轨迹', textStyle: { bold: true, color: '#1E4FA8', fontSize: 16 }, cellStyle: { background: { color: '#F0F5FC' } } },&#10;                    ],&#10;                    [&#10;                        { text: '能改变外部世界？', textStyle: { textAlign: 'left', fontSize: 16 }, cellStyle: { background: { color: '#F7F9FC' } } },&#10;                        { text: '✗ 输出即结束', textStyle: { color: '#D9534F', fontSize: 16 }, cellStyle: { background: { color: '#F7F9FC' } } },&#10;                        { text: '✗ 靠手动整理', textStyle: { color: '#D9534F', fontSize: 16 }, cellStyle: { background: { color: '#F7F9FC' } } },&#10;                        { text: '✓ 写库·改计划·触发扫描', textStyle: { bold: true, color: '#1E4FA8', fontSize: 16 }, cellStyle: { background: { color: '#F0F5FC' } } },&#10;                    ],&#10;                    [&#10;                        { text: '会主动发起？', textStyle: { textAlign: 'left', fontSize: 16 } },&#10;                        { text: '✗ 一问一答', textStyle: { color: '#D9534F', fontSize: 16 } },&#10;                        { text: '✗ 等你打开', textStyle: { color: '#D9534F', fontSize: 16 } },&#10;                        { text: '✓ 定时巡检·推送简报', textStyle: { bold: true, color: '#1E4FA8', fontSize: 16 }, cellStyle: { background: { color: '#F0F5FC' } } },&#10;                    ],&#10;                    [&#10;                        { text: '输出能反向改进自己？', textStyle: { textAlign: 'left', fontSize: 16 }, cellStyle: { background: { color: '#F7F9FC' } } },&#10;                        { text: '✗ 无状态', textStyle: { color: '#D9534F', fontSize: 16 }, cellStyle: { background: { color: '#F7F9FC' } } },&#10;                        { text: '✗ 不理解内容', textStyle: { color: '#D9534F', fontSize: 16 }, cellStyle: { background: { color: '#F7F9FC' } } },&#10;                        { text: '✓ 采纳诊断→计划改写', textStyle: { bold: true, color: '#1E4FA8', fontSize: 16 }, cellStyle: { background: { color: '#F0F5FC' } } },&#10;                    ],&#10;                ]}&#10;            /&gt;&#10;            &lt;Text style={{ fontSize: 16, color: '#8B97A8', marginTop: 10 }}&gt;四个判定问题上，纯大模型与笔记软件几乎全是「否」——这是结构差别，不是能力强弱。&lt;/Text&gt;&#10;        &lt;/Box&gt;&#10;        &lt;Box style={{ flex: 1, flexDirection: 'column', justifyContent: 'space-between' }}&gt;&#10;            &lt;Box style={{ padding: '18px 22px', background: '#F7F9FC', borderRadius: 10, border: '1px solid #D6DCE5', borderTop: '4px solid #1E4FA8' }}&gt;&#10;                &lt;Text style={{ fontSize: 21, fontWeight: 'bold', color: '#1A2230' }}&gt;选题创新 · 切「认知过程」&lt;/Text&gt;&#10;                &lt;Text style={{ fontSize: 18, color: '#4A5568', marginTop: 8, lineHeight: 1.55 }}&gt;&#10;                    不做内容存储的又一套轮子，管的是你的盲区、矛盾与病根——信息系统覆盖不到的那一半。&#10;                &lt;/Text&gt;&#10;            &lt;/Box&gt;&#10;            &lt;Box style={{ padding: '18px 22px', background: '#F7F9FC', borderRadius: 10, border: '1px solid #D6DCE5', borderTop: '4px solid #1E4FA8' }}&gt;&#10;                &lt;Text style={{ fontSize: 21, fontWeight: 'bold', color: '#1A2230' }}&gt;方案创新 · 冲突检测与影子主张&lt;/Text&gt;&#10;                &lt;Text style={{ fontSize: 18, color: '#4A5568', marginTop: 8, lineHeight: 1.55 }}&gt;&#10;                    L2 识别同主题对立主张；书籍通读提取观点，与个人笔记跨来源对撞——已用 4 本真书验证。&#10;                &lt;/Text&gt;&#10;            &lt;/Box&gt;&#10;            &lt;Box style={{ padding: '18px 22px', background: '#F7F9FC', borderRadius: 10, border: '1px solid #D6DCE5', borderTop: '4px solid #1E4FA8' }}&gt;&#10;                &lt;Text style={{ fontSize: 21, fontWeight: 'bold', color: '#1A2230' }}&gt;工程创新 · 先向量后模型&lt;/Text&gt;&#10;                &lt;Text style={{ fontSize: 18, color: '#4A5568', marginTop: 8, lineHeight: 1.55 }}&gt;&#10;                    让便宜的向量先判断「值不值得让贵的模型看」，判定候选对从全量两两比较压到每次 ≤20 对。&#10;                &lt;/Text&gt;&#10;            &lt;/Box&gt;&#10;        &lt;/Box&gt;&#10;    &lt;/Box&gt;&#10;    &lt;Box style={{ margin: '14px 40px 0 40px', padding: '13px 24px', background: '#0E3F8C', borderRadius: 8 }}&gt;&#10;        &lt;Text style={{ fontSize: 21, color: '#FFFFFF', textAlign: 'center' }}&gt;&#10;            创新落在结构上，不落在名词上——这张对比表就是「和现有方案比，我好在哪里」的回答&#10;        &lt;/Text&gt;&#10;    &lt;/Box&gt;&#10;    &lt;Box style={{ flexDirection: 'row', justifyContent: 'space-between', alignItems: 'center', padding: '10px 40px 14px 40px' }}&gt;&#10;        &lt;Text style={{ fontSize: 14, color: '#8B97A8' }}&gt;认知副驾 · Cognitive Copilot&lt;/Text&gt;&#10;        &lt;Text style={{ fontSize: 14, color: '#1E4FA8' }}&gt;09 / 14&lt;/Text&gt;&#10;    &lt;/Box&gt;&#10;&lt;/Slide&gt;&#10;"/>
+        <p:cNvPr id="337" name="" descr="&lt;Slide style={{ width: 1280, height: 720, background: '#FFFFFF', flexDirection: 'column' }}&gt;&#10;    &lt;Box style={{ width: '100%', height: 8, background: '#1E4FA8' }} /&gt;&#10;    &lt;Box style={{ flexDirection: 'row', justifyContent: 'space-between', alignItems: 'flex-end', padding: '20px 40px 12px 40px' }}&gt;&#10;        &lt;Text style={{ fontSize: 34, fontWeight: 'bold', color: '#0E3F8C' }}&gt;维度二 · 创新性（15 分）：和现有方案比，好在哪里&lt;/Text&gt;&#10;        &lt;Text style={{ fontSize: 17, color: '#8B97A8' }}&gt;结构对比 · 不靠名词&lt;/Text&gt;&#10;    &lt;/Box&gt;&#10;    &lt;Box style={{ flex: 1, flexDirection: 'row', gap: 26, padding: '6px 40px 0 40px' }}&gt;&#10;        &lt;Box style={{ width: 730, flexDirection: 'column' }}&gt;&#10;            &lt;Table&#10;                style={{ width: 730, height: 356 }}&#10;                defaultTextStyle={{ fontSize: 17, textAlign: 'center', color: '#1A2230' }}&#10;                defaultCellStyle={{&#10;                    border: {&#10;                        left: { width: 1, color: '#D6DCE5' },&#10;                        right: { width: 1, color: '#D6DCE5' },&#10;                        top: { width: 1, color: '#D6DCE5' },&#10;                        bottom: { width: 1, color: '#D6DCE5' },&#10;                    },&#10;                    background: { color: '#FFFFFF' },&#10;                }}&#10;                cells={[&#10;                    [&#10;                        { text: '判定问题', textStyle: { bold: true, color: '#FFFFFF', fontSize: 17 }, cellStyle: { background: { color: '#0E3F8C' } } },&#10;                        { text: '网页 AI（豆包类）', textStyle: { bold: true, color: '#FFFFFF', fontSize: 17 }, cellStyle: { background: { color: '#0E3F8C' } } },&#10;                        { text: '笔记软件（Notion 类）', textStyle: { bold: true, color: '#FFFFFF', fontSize: 17 }, cellStyle: { background: { color: '#0E3F8C' } } },&#10;                        { text: '认知副驾', textStyle: { bold: true, color: '#FFC107', fontSize: 17 }, cellStyle: { background: { color: '#0E3F8C' } } },&#10;                    ],&#10;                    [&#10;                        { text: '有跨会话的持久状态？', textStyle: { textAlign: 'left', fontSize: 16 } },&#10;                        { text: '✗ 对话完就忘', textStyle: { color: '#D9534F', fontSize: 16 } },&#10;                        { text: '△ 只存内容', textStyle: { color: '#B8860B', fontSize: 16 } },&#10;                        { text: '✓ 知识＋观点＋行为轨迹', textStyle: { bold: true, color: '#1E4FA8', fontSize: 16 }, cellStyle: { background: { color: '#F0F5FC' } } },&#10;                    ],&#10;                    [&#10;                        { text: '能改变外部世界？', textStyle: { textAlign: 'left', fontSize: 16 }, cellStyle: { background: { color: '#F7F9FC' } } },&#10;                        { text: '✗ 输出即结束', textStyle: { color: '#D9534F', fontSize: 16 }, cellStyle: { background: { color: '#F7F9FC' } } },&#10;                        { text: '✗ 靠手动整理', textStyle: { color: '#D9534F', fontSize: 16 }, cellStyle: { background: { color: '#F7F9FC' } } },&#10;                        { text: '✓ 写库·改计划·触发扫描', textStyle: { bold: true, color: '#1E4FA8', fontSize: 16 }, cellStyle: { background: { color: '#F0F5FC' } } },&#10;                    ],&#10;                    [&#10;                        { text: '会主动发起？', textStyle: { textAlign: 'left', fontSize: 16 } },&#10;                        { text: '✗ 一问一答', textStyle: { color: '#D9534F', fontSize: 16 } },&#10;                        { text: '✗ 等你打开', textStyle: { color: '#D9534F', fontSize: 16 } },&#10;                        { text: '✓ 定时巡检·推送简报', textStyle: { bold: true, color: '#1E4FA8', fontSize: 16 }, cellStyle: { background: { color: '#F0F5FC' } } },&#10;                    ],&#10;                    [&#10;                        { text: '输出能反向改进自己？', textStyle: { textAlign: 'left', fontSize: 16 }, cellStyle: { background: { color: '#F7F9FC' } } },&#10;                        { text: '✗ 无状态', textStyle: { color: '#D9534F', fontSize: 16 }, cellStyle: { background: { color: '#F7F9FC' } } },&#10;                        { text: '✗ 不理解内容', textStyle: { color: '#D9534F', fontSize: 16 }, cellStyle: { background: { color: '#F7F9FC' } } },&#10;                        { text: '✓ 采纳诊断→计划改写', textStyle: { bold: true, color: '#1E4FA8', fontSize: 16 }, cellStyle: { background: { color: '#F0F5FC' } } },&#10;                    ],&#10;                ]}&#10;            /&gt;&#10;            &lt;Text style={{ fontSize: 16, color: '#8B97A8', marginTop: 10 }}&gt;四个判定问题上，纯大模型与笔记软件几乎全是「否」——这是结构差别，不是能力强弱。&lt;/Text&gt;&#10;        &lt;/Box&gt;&#10;        &lt;Box style={{ flex: 1, flexDirection: 'column', justifyContent: 'space-between' }}&gt;&#10;            &lt;Box style={{ padding: '18px 22px', background: '#F7F9FC', borderRadius: 10, border: '1px solid #D6DCE5', borderTop: '4px solid #1E4FA8' }}&gt;&#10;                &lt;Text style={{ fontSize: 21, fontWeight: 'bold', color: '#1A2230' }}&gt;选题创新 · 切「认知过程」&lt;/Text&gt;&#10;                &lt;Text style={{ fontSize: 18, color: '#4A5568', marginTop: 8, lineHeight: 1.55 }}&gt;&#10;                    不做内容存储的又一套轮子，管的是你的盲区、矛盾与病根——信息系统覆盖不到的那一半。&#10;                &lt;/Text&gt;&#10;            &lt;/Box&gt;&#10;            &lt;Box style={{ padding: '18px 22px', background: '#F7F9FC', borderRadius: 10, border: '1px solid #D6DCE5', borderTop: '4px solid #1E4FA8' }}&gt;&#10;                &lt;Text style={{ fontSize: 21, fontWeight: 'bold', color: '#1A2230' }}&gt;方案创新 · 冲突检测与影子主张&lt;/Text&gt;&#10;                &lt;Text style={{ fontSize: 18, color: '#4A5568', marginTop: 8, lineHeight: 1.55 }}&gt;&#10;                    L2 识别同主题对立主张；书籍通读提取观点，与个人笔记跨来源对撞——已用 4 本真书验证。&#10;                &lt;/Text&gt;&#10;            &lt;/Box&gt;&#10;            &lt;Box style={{ padding: '18px 22px', background: '#F7F9FC', borderRadius: 10, border: '1px solid #D6DCE5', borderTop: '4px solid #1E4FA8' }}&gt;&#10;                &lt;Text style={{ fontSize: 21, fontWeight: 'bold', color: '#1A2230' }}&gt;工程创新 · 先向量后模型&lt;/Text&gt;&#10;                &lt;Text style={{ fontSize: 18, color: '#4A5568', marginTop: 8, lineHeight: 1.55 }}&gt;&#10;                    让便宜的向量先判断「值不值得让贵的模型看」，判定候选对从全量两两比较压到每次 ≤20 对。&#10;                &lt;/Text&gt;&#10;            &lt;/Box&gt;&#10;        &lt;/Box&gt;&#10;    &lt;/Box&gt;&#10;    &lt;Box style={{ margin: '14px 40px 0 40px', padding: '13px 24px', background: '#0E3F8C', borderRadius: 8 }}&gt;&#10;        &lt;Text style={{ fontSize: 21, color: '#FFFFFF', textAlign: 'center' }}&gt;&#10;            创新落在结构上，不落在名词上——这张对比表就是「和现有方案比，我好在哪里」的回答&#10;        &lt;/Text&gt;&#10;    &lt;/Box&gt;&#10;    &lt;Box style={{ flexDirection: 'row', justifyContent: 'space-between', alignItems: 'center', padding: '10px 40px 14px 40px' }}&gt;&#10;        &lt;Text style={{ fontSize: 14, color: '#8B97A8' }}&gt;认知副驾 · Cognitive Copilot&lt;/Text&gt;&#10;        &lt;Text style={{ fontSize: 14, color: '#1E4FA8' }}&gt;09 / 14&lt;/Text&gt;&#10;    &lt;/Box&gt;&#10;&lt;/Slide&gt;&#10;"/>
         <p:cNvGrpSpPr/>
         <p:nvPr/>
       </p:nvGrpSpPr>
@@ -15121,7 +15313,7 @@
       </p:grpSpPr>
       <p:sp>
         <p:nvSpPr>
-          <p:cNvPr id="334" name=""/>
+          <p:cNvPr id="338" name=""/>
           <p:cNvSpPr/>
           <p:nvPr/>
         </p:nvSpPr>
@@ -15145,7 +15337,7 @@
       </p:sp>
       <p:sp>
         <p:nvSpPr>
-          <p:cNvPr id="335" name=""/>
+          <p:cNvPr id="339" name=""/>
           <p:cNvSpPr/>
           <p:nvPr/>
         </p:nvSpPr>
@@ -15169,7 +15361,7 @@
       </p:sp>
       <p:sp>
         <p:nvSpPr>
-          <p:cNvPr id="336" name="" descr="{&quot;isTemplate&quot;:true,&quot;type&quot;:&quot;text&quot;}"/>
+          <p:cNvPr id="340" name="" descr="{&quot;isTemplate&quot;:true,&quot;type&quot;:&quot;text&quot;}"/>
           <p:cNvSpPr txBox="1"/>
           <p:nvPr/>
         </p:nvSpPr>
@@ -15244,7 +15436,7 @@
       </p:sp>
       <p:sp>
         <p:nvSpPr>
-          <p:cNvPr id="337" name="" descr="{&quot;isTemplate&quot;:true,&quot;type&quot;:&quot;text&quot;}"/>
+          <p:cNvPr id="341" name="" descr="{&quot;isTemplate&quot;:true,&quot;type&quot;:&quot;text&quot;}"/>
           <p:cNvSpPr txBox="1"/>
           <p:nvPr/>
         </p:nvSpPr>
@@ -15299,7 +15491,7 @@
       </p:sp>
       <p:graphicFrame>
         <p:nvGraphicFramePr>
-          <p:cNvPr id="338" name=""/>
+          <p:cNvPr id="342" name=""/>
           <p:cNvGraphicFramePr/>
           <p:nvPr/>
         </p:nvGraphicFramePr>
@@ -16203,7 +16395,7 @@
       </p:graphicFrame>
       <p:sp>
         <p:nvSpPr>
-          <p:cNvPr id="339" name="" descr="{&quot;isTemplate&quot;:true,&quot;type&quot;:&quot;text&quot;}"/>
+          <p:cNvPr id="343" name="" descr="{&quot;isTemplate&quot;:true,&quot;type&quot;:&quot;text&quot;}"/>
           <p:cNvSpPr txBox="1"/>
           <p:nvPr/>
         </p:nvSpPr>
@@ -16238,7 +16430,7 @@
       </p:sp>
       <p:sp>
         <p:nvSpPr>
-          <p:cNvPr id="340" name=""/>
+          <p:cNvPr id="344" name=""/>
           <p:cNvSpPr/>
           <p:nvPr/>
         </p:nvSpPr>
@@ -16264,7 +16456,7 @@
       </p:sp>
       <p:sp>
         <p:nvSpPr>
-          <p:cNvPr id="341" name=""/>
+          <p:cNvPr id="345" name=""/>
           <p:cNvSpPr/>
           <p:nvPr/>
         </p:nvSpPr>
@@ -16321,7 +16513,7 @@
       </p:sp>
       <p:sp>
         <p:nvSpPr>
-          <p:cNvPr id="342" name="" descr="{&quot;isTemplate&quot;:true,&quot;type&quot;:&quot;text&quot;}"/>
+          <p:cNvPr id="346" name="" descr="{&quot;isTemplate&quot;:true,&quot;type&quot;:&quot;text&quot;}"/>
           <p:cNvSpPr txBox="1"/>
           <p:nvPr/>
         </p:nvSpPr>
@@ -16376,7 +16568,7 @@
       </p:sp>
       <p:sp>
         <p:nvSpPr>
-          <p:cNvPr id="343" name="" descr="{&quot;isTemplate&quot;:true,&quot;type&quot;:&quot;text&quot;}"/>
+          <p:cNvPr id="347" name="" descr="{&quot;isTemplate&quot;:true,&quot;type&quot;:&quot;text&quot;}"/>
           <p:cNvSpPr txBox="1"/>
           <p:nvPr/>
         </p:nvSpPr>
@@ -16413,7 +16605,7 @@
       </p:sp>
       <p:sp>
         <p:nvSpPr>
-          <p:cNvPr id="344" name=""/>
+          <p:cNvPr id="348" name=""/>
           <p:cNvSpPr/>
           <p:nvPr/>
         </p:nvSpPr>
@@ -16439,7 +16631,7 @@
       </p:sp>
       <p:sp>
         <p:nvSpPr>
-          <p:cNvPr id="345" name=""/>
+          <p:cNvPr id="349" name=""/>
           <p:cNvSpPr/>
           <p:nvPr/>
         </p:nvSpPr>
@@ -16496,7 +16688,7 @@
       </p:sp>
       <p:sp>
         <p:nvSpPr>
-          <p:cNvPr id="346" name="" descr="{&quot;isTemplate&quot;:true,&quot;type&quot;:&quot;text&quot;}"/>
+          <p:cNvPr id="350" name="" descr="{&quot;isTemplate&quot;:true,&quot;type&quot;:&quot;text&quot;}"/>
           <p:cNvSpPr txBox="1"/>
           <p:nvPr/>
         </p:nvSpPr>
@@ -16551,7 +16743,7 @@
       </p:sp>
       <p:sp>
         <p:nvSpPr>
-          <p:cNvPr id="347" name="" descr="{&quot;isTemplate&quot;:true,&quot;type&quot;:&quot;text&quot;}"/>
+          <p:cNvPr id="351" name="" descr="{&quot;isTemplate&quot;:true,&quot;type&quot;:&quot;text&quot;}"/>
           <p:cNvSpPr txBox="1"/>
           <p:nvPr/>
         </p:nvSpPr>
@@ -16618,7 +16810,7 @@
       </p:sp>
       <p:sp>
         <p:nvSpPr>
-          <p:cNvPr id="348" name=""/>
+          <p:cNvPr id="352" name=""/>
           <p:cNvSpPr/>
           <p:nvPr/>
         </p:nvSpPr>
@@ -16644,7 +16836,7 @@
       </p:sp>
       <p:sp>
         <p:nvSpPr>
-          <p:cNvPr id="349" name=""/>
+          <p:cNvPr id="353" name=""/>
           <p:cNvSpPr/>
           <p:nvPr/>
         </p:nvSpPr>
@@ -16701,7 +16893,7 @@
       </p:sp>
       <p:sp>
         <p:nvSpPr>
-          <p:cNvPr id="350" name="" descr="{&quot;isTemplate&quot;:true,&quot;type&quot;:&quot;text&quot;}"/>
+          <p:cNvPr id="354" name="" descr="{&quot;isTemplate&quot;:true,&quot;type&quot;:&quot;text&quot;}"/>
           <p:cNvSpPr txBox="1"/>
           <p:nvPr/>
         </p:nvSpPr>
@@ -16756,7 +16948,7 @@
       </p:sp>
       <p:sp>
         <p:nvSpPr>
-          <p:cNvPr id="351" name="" descr="{&quot;isTemplate&quot;:true,&quot;type&quot;:&quot;text&quot;}"/>
+          <p:cNvPr id="355" name="" descr="{&quot;isTemplate&quot;:true,&quot;type&quot;:&quot;text&quot;}"/>
           <p:cNvSpPr txBox="1"/>
           <p:nvPr/>
         </p:nvSpPr>
@@ -16813,7 +17005,7 @@
       </p:sp>
       <p:sp>
         <p:nvSpPr>
-          <p:cNvPr id="352" name=""/>
+          <p:cNvPr id="356" name=""/>
           <p:cNvSpPr/>
           <p:nvPr/>
         </p:nvSpPr>
@@ -16839,7 +17031,7 @@
       </p:sp>
       <p:sp>
         <p:nvSpPr>
-          <p:cNvPr id="353" name="" descr="{&quot;isTemplate&quot;:true,&quot;type&quot;:&quot;text&quot;}"/>
+          <p:cNvPr id="357" name="" descr="{&quot;isTemplate&quot;:true,&quot;type&quot;:&quot;text&quot;}"/>
           <p:cNvSpPr txBox="1"/>
           <p:nvPr/>
         </p:nvSpPr>
@@ -16874,7 +17066,7 @@
       </p:sp>
       <p:sp>
         <p:nvSpPr>
-          <p:cNvPr id="354" name="" descr="{&quot;isTemplate&quot;:true,&quot;type&quot;:&quot;text&quot;}"/>
+          <p:cNvPr id="358" name="" descr="{&quot;isTemplate&quot;:true,&quot;type&quot;:&quot;text&quot;}"/>
           <p:cNvSpPr txBox="1"/>
           <p:nvPr/>
         </p:nvSpPr>
@@ -16919,7 +17111,7 @@
       </p:sp>
       <p:sp>
         <p:nvSpPr>
-          <p:cNvPr id="355" name="" descr="{&quot;isTemplate&quot;:true,&quot;type&quot;:&quot;text&quot;}"/>
+          <p:cNvPr id="359" name="" descr="{&quot;isTemplate&quot;:true,&quot;type&quot;:&quot;text&quot;}"/>
           <p:cNvSpPr txBox="1"/>
           <p:nvPr/>
         </p:nvSpPr>
